--- a/week01/ddpm_review.pptx
+++ b/week01/ddpm_review.pptx
@@ -5,7 +5,7 @@
     <p:sldMasterId id="2147483648" r:id="rId1"/>
   </p:sldMasterIdLst>
   <p:notesMasterIdLst>
-    <p:notesMasterId r:id="rId14"/>
+    <p:notesMasterId r:id="rId15"/>
   </p:notesMasterIdLst>
   <p:sldIdLst>
     <p:sldId id="256" r:id="rId2"/>
@@ -14,12 +14,13 @@
     <p:sldId id="259" r:id="rId5"/>
     <p:sldId id="260" r:id="rId6"/>
     <p:sldId id="261" r:id="rId7"/>
-    <p:sldId id="262" r:id="rId8"/>
-    <p:sldId id="263" r:id="rId9"/>
-    <p:sldId id="264" r:id="rId10"/>
-    <p:sldId id="265" r:id="rId11"/>
-    <p:sldId id="266" r:id="rId12"/>
-    <p:sldId id="267" r:id="rId13"/>
+    <p:sldId id="268" r:id="rId8"/>
+    <p:sldId id="262" r:id="rId9"/>
+    <p:sldId id="263" r:id="rId10"/>
+    <p:sldId id="264" r:id="rId11"/>
+    <p:sldId id="265" r:id="rId12"/>
+    <p:sldId id="266" r:id="rId13"/>
+    <p:sldId id="267" r:id="rId14"/>
   </p:sldIdLst>
   <p:sldSz cx="12192000" cy="6858000"/>
   <p:notesSz cx="6858000" cy="9144000"/>
@@ -3784,7 +3785,8 @@
               </a:defRPr>
             </a:pPr>
             <a:r>
-              <a:t>Model Architecture &amp; Implementation</a:t>
+              <a:rPr dirty="0"/>
+              <a:t>Training &amp; Sampling</a:t>
             </a:r>
           </a:p>
         </p:txBody>
@@ -3820,7 +3822,7 @@
               </a:defRPr>
             </a:pPr>
             <a:r>
-              <a:t>10</a:t>
+              <a:t>09</a:t>
             </a:r>
           </a:p>
         </p:txBody>
@@ -3869,328 +3871,30 @@
           </a:p>
         </p:txBody>
       </p:sp>
-      <p:sp>
-        <p:nvSpPr>
-          <p:cNvPr id="5" name="TextBox 4"/>
-          <p:cNvSpPr txBox="1"/>
-          <p:nvPr/>
-        </p:nvSpPr>
-        <p:spPr>
-          <a:xfrm>
-            <a:off x="868680" y="1417320"/>
-            <a:ext cx="10424160" cy="2616101"/>
-          </a:xfrm>
-          <a:prstGeom prst="rect">
-            <a:avLst/>
-          </a:prstGeom>
-          <a:noFill/>
-        </p:spPr>
-        <p:txBody>
-          <a:bodyPr wrap="square">
-            <a:spAutoFit/>
-          </a:bodyPr>
-          <a:lstStyle/>
-          <a:p>
-            <a:pPr>
-              <a:spcAft>
-                <a:spcPts val="1200"/>
-              </a:spcAft>
-              <a:defRPr sz="1900">
-                <a:solidFill>
-                  <a:srgbClr val="F5F5F5"/>
-                </a:solidFill>
-                <a:latin typeface="Noto Sans CJK KR"/>
-              </a:defRPr>
-            </a:pPr>
-            <a:r>
-              <a:rPr dirty="0"/>
-              <a:t>• Backbone: </a:t>
-            </a:r>
-            <a:r>
-              <a:rPr lang="en-US" altLang="ko-KR" dirty="0">
-                <a:solidFill>
-                  <a:srgbClr val="FFFFFF"/>
-                </a:solidFill>
-                <a:latin typeface="Malgun Gothic"/>
-              </a:rPr>
-              <a:t>Wide </a:t>
-            </a:r>
-            <a:r>
-              <a:rPr lang="en-US" altLang="ko-KR" dirty="0" err="1">
-                <a:solidFill>
-                  <a:srgbClr val="FFFFFF"/>
-                </a:solidFill>
-                <a:latin typeface="Malgun Gothic"/>
-              </a:rPr>
-              <a:t>ResNet</a:t>
-            </a:r>
-            <a:r>
-              <a:rPr lang="en-US" altLang="ko-KR" dirty="0">
-                <a:solidFill>
-                  <a:srgbClr val="FFFFFF"/>
-                </a:solidFill>
-                <a:latin typeface="Malgun Gothic"/>
-              </a:rPr>
-              <a:t> </a:t>
-            </a:r>
-            <a:r>
-              <a:rPr lang="ko-KR" altLang="en-US" dirty="0">
-                <a:solidFill>
-                  <a:srgbClr val="FFFFFF"/>
-                </a:solidFill>
-                <a:latin typeface="Malgun Gothic"/>
-              </a:rPr>
-              <a:t>기반 </a:t>
-            </a:r>
-            <a:r>
-              <a:rPr lang="en-US" altLang="ko-KR" dirty="0">
-                <a:solidFill>
-                  <a:srgbClr val="FFFFFF"/>
-                </a:solidFill>
-                <a:latin typeface="Malgun Gothic"/>
-              </a:rPr>
-              <a:t>U-Net architecture</a:t>
-            </a:r>
-            <a:endParaRPr dirty="0"/>
-          </a:p>
-          <a:p>
-            <a:pPr>
-              <a:spcAft>
-                <a:spcPts val="1200"/>
-              </a:spcAft>
-              <a:defRPr sz="1900">
-                <a:solidFill>
-                  <a:srgbClr val="F5F5F5"/>
-                </a:solidFill>
-                <a:latin typeface="Noto Sans CJK KR"/>
-              </a:defRPr>
-            </a:pPr>
-            <a:r>
-              <a:rPr dirty="0"/>
-              <a:t>• Timestep </a:t>
-            </a:r>
-            <a:r>
-              <a:rPr lang="en-US" dirty="0"/>
-              <a:t>t</a:t>
-            </a:r>
-            <a:r>
-              <a:rPr lang="ko-KR" altLang="en-US" dirty="0"/>
-              <a:t>는 </a:t>
-            </a:r>
-            <a:r>
-              <a:rPr lang="en-US" dirty="0"/>
-              <a:t>sinusoidal position embedding</a:t>
-            </a:r>
-            <a:r>
-              <a:rPr lang="ko-KR" altLang="en-US" dirty="0"/>
-              <a:t>으로 입력된다</a:t>
-            </a:r>
-            <a:r>
-              <a:rPr lang="en-US" altLang="ko-KR" dirty="0"/>
-              <a:t>.</a:t>
-            </a:r>
-            <a:endParaRPr lang="en-US" dirty="0"/>
-          </a:p>
-          <a:p>
-            <a:pPr>
-              <a:spcAft>
-                <a:spcPts val="1200"/>
-              </a:spcAft>
-              <a:defRPr sz="1900">
-                <a:solidFill>
-                  <a:srgbClr val="F5F5F5"/>
-                </a:solidFill>
-                <a:latin typeface="Noto Sans CJK KR"/>
-              </a:defRPr>
-            </a:pPr>
-            <a:r>
-              <a:rPr dirty="0"/>
-              <a:t>• </a:t>
-            </a:r>
-            <a:r>
-              <a:rPr lang="en-US" dirty="0"/>
-              <a:t>16×16 feature-map resolution</a:t>
-            </a:r>
-            <a:r>
-              <a:rPr lang="ko-KR" altLang="en-US" dirty="0"/>
-              <a:t>에서 </a:t>
-            </a:r>
-            <a:r>
-              <a:rPr lang="en-US" dirty="0"/>
-              <a:t>self-attention</a:t>
-            </a:r>
-            <a:r>
-              <a:rPr lang="ko-KR" altLang="en-US" dirty="0"/>
-              <a:t>을 사용한다</a:t>
-            </a:r>
-            <a:r>
-              <a:rPr lang="en-US" altLang="ko-KR" dirty="0"/>
-              <a:t>.</a:t>
-            </a:r>
-          </a:p>
-          <a:p>
-            <a:pPr>
-              <a:spcAft>
-                <a:spcPts val="1200"/>
-              </a:spcAft>
-              <a:defRPr sz="1900">
-                <a:solidFill>
-                  <a:srgbClr val="F5F5F5"/>
-                </a:solidFill>
-                <a:latin typeface="Noto Sans CJK KR"/>
-              </a:defRPr>
-            </a:pPr>
-            <a:r>
-              <a:rPr lang="en-US" altLang="ko-KR" dirty="0"/>
-              <a:t>• </a:t>
-            </a:r>
-            <a:r>
-              <a:rPr lang="en-US" dirty="0"/>
-              <a:t>Diffusion length: T = 1000.</a:t>
-            </a:r>
-          </a:p>
-          <a:p>
-            <a:pPr>
-              <a:spcAft>
-                <a:spcPts val="1200"/>
-              </a:spcAft>
-              <a:defRPr sz="1900">
-                <a:solidFill>
-                  <a:srgbClr val="F5F5F5"/>
-                </a:solidFill>
-                <a:latin typeface="Noto Sans CJK KR"/>
-              </a:defRPr>
-            </a:pPr>
-            <a:r>
-              <a:rPr dirty="0"/>
-              <a:t>• </a:t>
-            </a:r>
-            <a:r>
-              <a:rPr lang="en-US" dirty="0">
-                <a:solidFill>
-                  <a:srgbClr val="FFFFFF"/>
-                </a:solidFill>
-                <a:latin typeface="Malgun Gothic"/>
-              </a:rPr>
-              <a:t>forward process</a:t>
-            </a:r>
-            <a:r>
-              <a:rPr lang="ko-KR" altLang="en-US" dirty="0">
-                <a:solidFill>
-                  <a:srgbClr val="FFFFFF"/>
-                </a:solidFill>
-                <a:latin typeface="Malgun Gothic"/>
-              </a:rPr>
-              <a:t>의 </a:t>
-            </a:r>
-            <a:r>
-              <a:rPr lang="en-US" altLang="ko-KR" dirty="0">
-                <a:solidFill>
-                  <a:srgbClr val="FFFFFF"/>
-                </a:solidFill>
-                <a:latin typeface="Malgun Gothic"/>
-              </a:rPr>
-              <a:t>variance β₁,…,βT</a:t>
-            </a:r>
-            <a:r>
-              <a:rPr lang="ko-KR" altLang="en-US" dirty="0">
-                <a:solidFill>
-                  <a:srgbClr val="FFFFFF"/>
-                </a:solidFill>
-                <a:latin typeface="Malgun Gothic"/>
-              </a:rPr>
-              <a:t>는 </a:t>
-            </a:r>
-            <a:r>
-              <a:rPr lang="en-US" altLang="ko-KR" dirty="0">
-                <a:solidFill>
-                  <a:srgbClr val="FFFFFF"/>
-                </a:solidFill>
-                <a:latin typeface="Malgun Gothic"/>
-              </a:rPr>
-              <a:t>10⁻⁴</a:t>
-            </a:r>
-            <a:r>
-              <a:rPr lang="ko-KR" altLang="en-US" dirty="0">
-                <a:solidFill>
-                  <a:srgbClr val="FFFFFF"/>
-                </a:solidFill>
-                <a:latin typeface="Malgun Gothic"/>
-              </a:rPr>
-              <a:t>에서 </a:t>
-            </a:r>
-            <a:r>
-              <a:rPr lang="en-US" altLang="ko-KR" dirty="0">
-                <a:solidFill>
-                  <a:srgbClr val="FFFFFF"/>
-                </a:solidFill>
-                <a:latin typeface="Malgun Gothic"/>
-              </a:rPr>
-              <a:t>0.02</a:t>
-            </a:r>
-            <a:r>
-              <a:rPr lang="ko-KR" altLang="en-US" dirty="0">
-                <a:solidFill>
-                  <a:srgbClr val="FFFFFF"/>
-                </a:solidFill>
-                <a:latin typeface="Malgun Gothic"/>
-              </a:rPr>
-              <a:t>까지 선형적으로 증가하는 고정 상수이다</a:t>
-            </a:r>
-            <a:endParaRPr lang="en-US" dirty="0"/>
-          </a:p>
-          <a:p>
-            <a:pPr>
-              <a:spcAft>
-                <a:spcPts val="1200"/>
-              </a:spcAft>
-              <a:defRPr sz="1900">
-                <a:solidFill>
-                  <a:srgbClr val="F5F5F5"/>
-                </a:solidFill>
-                <a:latin typeface="Noto Sans CJK KR"/>
-              </a:defRPr>
-            </a:pPr>
-            <a:r>
-              <a:rPr dirty="0"/>
-              <a:t>• </a:t>
-            </a:r>
-            <a:r>
-              <a:rPr lang="ko-KR" altLang="en-US" dirty="0"/>
-              <a:t>실험에서는 </a:t>
-            </a:r>
-            <a:r>
-              <a:rPr lang="en-US" altLang="ko-KR" dirty="0"/>
-              <a:t>reverse</a:t>
-            </a:r>
-            <a:r>
-              <a:rPr lang="ko-KR" altLang="en-US" dirty="0"/>
-              <a:t> </a:t>
-            </a:r>
-            <a:r>
-              <a:rPr lang="en-US" altLang="ko-KR" dirty="0"/>
-              <a:t>process</a:t>
-            </a:r>
-            <a:r>
-              <a:rPr lang="ko-KR" altLang="en-US" dirty="0"/>
-              <a:t>의 분산을 학습하지 않고</a:t>
-            </a:r>
-            <a:r>
-              <a:rPr lang="en-US" altLang="ko-KR" dirty="0"/>
-              <a:t>, t</a:t>
-            </a:r>
-            <a:r>
-              <a:rPr lang="ko-KR" altLang="en-US" dirty="0"/>
-              <a:t>에 따라 미리 정해진 상수로 설정한다</a:t>
-            </a:r>
-            <a:r>
-              <a:rPr lang="en-US" altLang="ko-KR" dirty="0"/>
-              <a:t>.</a:t>
-            </a:r>
-            <a:endParaRPr dirty="0"/>
-          </a:p>
-        </p:txBody>
-      </p:sp>
+      <p:pic>
+        <p:nvPicPr>
+          <p:cNvPr id="5" name="Picture 4" descr="s7_img2_gray.png"/>
+          <p:cNvPicPr>
+            <a:picLocks noChangeAspect="1"/>
+          </p:cNvPicPr>
+          <p:nvPr/>
+        </p:nvPicPr>
+        <p:blipFill>
+          <a:blip r:embed="rId2"/>
+          <a:stretch>
+            <a:fillRect/>
+          </a:stretch>
+        </p:blipFill>
+        <p:spPr>
+          <a:xfrm>
+            <a:off x="731520" y="1448709"/>
+            <a:ext cx="10744200" cy="2726140"/>
+          </a:xfrm>
+          <a:prstGeom prst="rect">
+            <a:avLst/>
+          </a:prstGeom>
+        </p:spPr>
+      </p:pic>
       <p:sp>
         <p:nvSpPr>
           <p:cNvPr id="6" name="TextBox 5"/>
@@ -4199,8 +3903,8 @@
         </p:nvSpPr>
         <p:spPr>
           <a:xfrm>
-            <a:off x="868680" y="5806440"/>
-            <a:ext cx="10332720" cy="369332"/>
+            <a:off x="914400" y="4526280"/>
+            <a:ext cx="1097280" cy="320040"/>
           </a:xfrm>
           <a:prstGeom prst="rect">
             <a:avLst/>
@@ -4213,22 +3917,225 @@
           </a:bodyPr>
           <a:lstStyle/>
           <a:p>
+            <a:pPr algn="l">
+              <a:defRPr sz="1600" b="1">
+                <a:solidFill>
+                  <a:srgbClr val="B4B4B4"/>
+                </a:solidFill>
+                <a:latin typeface="Noto Sans CJK KR"/>
+              </a:defRPr>
+            </a:pPr>
+            <a:r>
+              <a:t>Training</a:t>
+            </a:r>
+          </a:p>
+        </p:txBody>
+      </p:sp>
+      <p:sp>
+        <p:nvSpPr>
+          <p:cNvPr id="7" name="TextBox 6"/>
+          <p:cNvSpPr txBox="1"/>
+          <p:nvPr/>
+        </p:nvSpPr>
+        <p:spPr>
+          <a:xfrm>
+            <a:off x="914400" y="4901184"/>
+            <a:ext cx="4892040" cy="646331"/>
+          </a:xfrm>
+          <a:prstGeom prst="rect">
+            <a:avLst/>
+          </a:prstGeom>
+          <a:noFill/>
+        </p:spPr>
+        <p:txBody>
+          <a:bodyPr wrap="square" anchor="t">
+            <a:spAutoFit/>
+          </a:bodyPr>
+          <a:lstStyle/>
+          <a:p>
             <a:pPr>
               <a:defRPr sz="1800" b="0">
                 <a:solidFill>
+                  <a:srgbClr val="F5F5F5"/>
+                </a:solidFill>
+                <a:latin typeface="Noto Sans CJK KR"/>
+              </a:defRPr>
+            </a:pPr>
+            <a:r>
+              <a:rPr lang="en-US" altLang="ko-KR" dirty="0">
+                <a:solidFill>
+                  <a:srgbClr val="FFFFFF"/>
+                </a:solidFill>
+                <a:latin typeface="Malgun Gothic"/>
+              </a:rPr>
+              <a:t>t</a:t>
+            </a:r>
+            <a:r>
+              <a:rPr lang="ko-KR" altLang="en-US" dirty="0">
+                <a:solidFill>
+                  <a:srgbClr val="FFFFFF"/>
+                </a:solidFill>
+                <a:latin typeface="Malgun Gothic"/>
+              </a:rPr>
+              <a:t>를 무작위로 선택하고 </a:t>
+            </a:r>
+            <a:r>
+              <a:rPr lang="en-US" altLang="ko-KR" dirty="0">
+                <a:solidFill>
+                  <a:srgbClr val="FFFFFF"/>
+                </a:solidFill>
+                <a:latin typeface="Malgun Gothic"/>
+              </a:rPr>
+              <a:t>xₜ</a:t>
+            </a:r>
+            <a:r>
+              <a:rPr lang="ko-KR" altLang="en-US" dirty="0">
+                <a:solidFill>
+                  <a:srgbClr val="FFFFFF"/>
+                </a:solidFill>
+                <a:latin typeface="Malgun Gothic"/>
+              </a:rPr>
+              <a:t>를 합성한 뒤</a:t>
+            </a:r>
+            <a:r>
+              <a:rPr lang="en-US" altLang="ko-KR" dirty="0">
+                <a:solidFill>
+                  <a:srgbClr val="FFFFFF"/>
+                </a:solidFill>
+                <a:latin typeface="Malgun Gothic"/>
+              </a:rPr>
+              <a:t>, noise-prediction loss</a:t>
+            </a:r>
+            <a:r>
+              <a:rPr lang="ko-KR" altLang="en-US" dirty="0">
+                <a:solidFill>
+                  <a:srgbClr val="FFFFFF"/>
+                </a:solidFill>
+                <a:latin typeface="Malgun Gothic"/>
+              </a:rPr>
+              <a:t>로 </a:t>
+            </a:r>
+            <a:r>
+              <a:rPr lang="en-US" altLang="ko-KR" dirty="0">
+                <a:solidFill>
+                  <a:srgbClr val="FFFFFF"/>
+                </a:solidFill>
+                <a:latin typeface="Malgun Gothic"/>
+              </a:rPr>
+              <a:t>θ</a:t>
+            </a:r>
+            <a:r>
+              <a:rPr lang="ko-KR" altLang="en-US" dirty="0">
+                <a:solidFill>
+                  <a:srgbClr val="FFFFFF"/>
+                </a:solidFill>
+                <a:latin typeface="Malgun Gothic"/>
+              </a:rPr>
+              <a:t>를 업데이트한다</a:t>
+            </a:r>
+            <a:r>
+              <a:rPr lang="en-US" altLang="ko-KR" dirty="0">
+                <a:solidFill>
+                  <a:srgbClr val="FFFFFF"/>
+                </a:solidFill>
+                <a:latin typeface="Malgun Gothic"/>
+              </a:rPr>
+              <a:t>.</a:t>
+            </a:r>
+          </a:p>
+        </p:txBody>
+      </p:sp>
+      <p:sp>
+        <p:nvSpPr>
+          <p:cNvPr id="8" name="TextBox 7"/>
+          <p:cNvSpPr txBox="1"/>
+          <p:nvPr/>
+        </p:nvSpPr>
+        <p:spPr>
+          <a:xfrm>
+            <a:off x="6400800" y="4526280"/>
+            <a:ext cx="1097280" cy="320040"/>
+          </a:xfrm>
+          <a:prstGeom prst="rect">
+            <a:avLst/>
+          </a:prstGeom>
+          <a:noFill/>
+        </p:spPr>
+        <p:txBody>
+          <a:bodyPr wrap="square" anchor="t">
+            <a:spAutoFit/>
+          </a:bodyPr>
+          <a:lstStyle/>
+          <a:p>
+            <a:pPr algn="l">
+              <a:defRPr sz="1600" b="1">
+                <a:solidFill>
                   <a:srgbClr val="B4B4B4"/>
                 </a:solidFill>
                 <a:latin typeface="Noto Sans CJK KR"/>
               </a:defRPr>
             </a:pPr>
             <a:r>
+              <a:t>Sampling</a:t>
+            </a:r>
+          </a:p>
+        </p:txBody>
+      </p:sp>
+      <p:sp>
+        <p:nvSpPr>
+          <p:cNvPr id="9" name="TextBox 8"/>
+          <p:cNvSpPr txBox="1"/>
+          <p:nvPr/>
+        </p:nvSpPr>
+        <p:spPr>
+          <a:xfrm>
+            <a:off x="6400800" y="4901184"/>
+            <a:ext cx="4617720" cy="646331"/>
+          </a:xfrm>
+          <a:prstGeom prst="rect">
+            <a:avLst/>
+          </a:prstGeom>
+          <a:noFill/>
+        </p:spPr>
+        <p:txBody>
+          <a:bodyPr wrap="square" anchor="t">
+            <a:spAutoFit/>
+          </a:bodyPr>
+          <a:lstStyle/>
+          <a:p>
+            <a:pPr>
+              <a:defRPr sz="1800" b="0">
+                <a:solidFill>
+                  <a:srgbClr val="F5F5F5"/>
+                </a:solidFill>
+                <a:latin typeface="Noto Sans CJK KR"/>
+              </a:defRPr>
+            </a:pPr>
+            <a:r>
+              <a:rPr dirty="0" err="1"/>
+              <a:t>xT</a:t>
+            </a:r>
+            <a:r>
+              <a:rPr dirty="0"/>
+              <a:t> ~ N(0,I)</a:t>
+            </a:r>
+            <a:r>
+              <a:rPr lang="ko-KR" altLang="en-US" dirty="0">
+                <a:solidFill>
+                  <a:srgbClr val="FFFFFF"/>
+                </a:solidFill>
+                <a:latin typeface="Malgun Gothic"/>
+              </a:rPr>
+              <a:t>에서 시작하여 </a:t>
+            </a:r>
+            <a:r>
               <a:rPr lang="en-US" altLang="ko-KR" dirty="0">
                 <a:solidFill>
                   <a:srgbClr val="FFFFFF"/>
                 </a:solidFill>
                 <a:latin typeface="Malgun Gothic"/>
               </a:rPr>
-              <a:t>Network output</a:t>
+              <a:t>xₜ₋₁</a:t>
             </a:r>
             <a:r>
               <a:rPr lang="ko-KR" altLang="en-US" dirty="0">
@@ -4237,7 +4144,7 @@
                 </a:solidFill>
                 <a:latin typeface="Malgun Gothic"/>
               </a:rPr>
-              <a:t>은 </a:t>
+              <a:t>을 반복적으로 샘플링하고 최종적으로 </a:t>
             </a:r>
             <a:r>
               <a:rPr lang="en-US" altLang="ko-KR" dirty="0">
@@ -4246,7 +4153,7 @@
                 </a:solidFill>
                 <a:latin typeface="Malgun Gothic"/>
               </a:rPr>
-              <a:t>xₜ</a:t>
+              <a:t>x₀</a:t>
             </a:r>
             <a:r>
               <a:rPr lang="ko-KR" altLang="en-US" dirty="0">
@@ -4255,16 +4162,7 @@
                 </a:solidFill>
                 <a:latin typeface="Malgun Gothic"/>
               </a:rPr>
-              <a:t>와 같은 차원을 가지며 </a:t>
-            </a:r>
-            <a:r>
-              <a:rPr lang="en-US" altLang="ko-KR" dirty="0" err="1">
-                <a:solidFill>
-                  <a:srgbClr val="FFFFFF"/>
-                </a:solidFill>
-                <a:latin typeface="Malgun Gothic"/>
-              </a:rPr>
-              <a:t>εθ</a:t>
+              <a:t>를 얻는다</a:t>
             </a:r>
             <a:r>
               <a:rPr lang="en-US" altLang="ko-KR" dirty="0">
@@ -4273,53 +4171,18 @@
                 </a:solidFill>
                 <a:latin typeface="Malgun Gothic"/>
               </a:rPr>
-              <a:t>(</a:t>
-            </a:r>
-            <a:r>
-              <a:rPr lang="en-US" altLang="ko-KR" dirty="0" err="1">
-                <a:solidFill>
-                  <a:srgbClr val="FFFFFF"/>
-                </a:solidFill>
-                <a:latin typeface="Malgun Gothic"/>
-              </a:rPr>
-              <a:t>xₜ,t</a:t>
-            </a:r>
-            <a:r>
-              <a:rPr lang="en-US" altLang="ko-KR" dirty="0">
-                <a:solidFill>
-                  <a:srgbClr val="FFFFFF"/>
-                </a:solidFill>
-                <a:latin typeface="Malgun Gothic"/>
-              </a:rPr>
-              <a:t>)</a:t>
-            </a:r>
-            <a:r>
-              <a:rPr lang="ko-KR" altLang="en-US" dirty="0">
-                <a:solidFill>
-                  <a:srgbClr val="FFFFFF"/>
-                </a:solidFill>
-                <a:latin typeface="Malgun Gothic"/>
-              </a:rPr>
-              <a:t>를 나타낸다</a:t>
-            </a:r>
-            <a:r>
-              <a:rPr lang="en-US" altLang="ko-KR" dirty="0">
-                <a:solidFill>
-                  <a:srgbClr val="FFFFFF"/>
-                </a:solidFill>
-                <a:latin typeface="Malgun Gothic"/>
-              </a:rPr>
               <a:t>.</a:t>
             </a:r>
-          </a:p>
-        </p:txBody>
-      </p:sp>
-      <p:sp>
-        <p:nvSpPr>
-          <p:cNvPr id="9" name="TextBox 8">
+            <a:endParaRPr dirty="0"/>
+          </a:p>
+        </p:txBody>
+      </p:sp>
+      <p:sp>
+        <p:nvSpPr>
+          <p:cNvPr id="12" name="TextBox 11">
             <a:extLst>
               <a:ext uri="{FF2B5EF4-FFF2-40B4-BE49-F238E27FC236}">
-                <a16:creationId xmlns:a16="http://schemas.microsoft.com/office/drawing/2014/main" id="{C08C5AFE-30BC-CB80-7BDF-69E7DB39BEC0}"/>
+                <a16:creationId xmlns:a16="http://schemas.microsoft.com/office/drawing/2014/main" id="{A97993BF-086B-4046-DA06-4D1FC083CA62}"/>
               </a:ext>
             </a:extLst>
           </p:cNvPr>
@@ -4426,7 +4289,7 @@
               </a:defRPr>
             </a:pPr>
             <a:r>
-              <a:t>Experiments</a:t>
+              <a:t>Model Architecture &amp; Implementation</a:t>
             </a:r>
           </a:p>
         </p:txBody>
@@ -4462,7 +4325,7 @@
               </a:defRPr>
             </a:pPr>
             <a:r>
-              <a:t>11</a:t>
+              <a:t>10</a:t>
             </a:r>
           </a:p>
         </p:txBody>
@@ -4511,36 +4374,457 @@
           </a:p>
         </p:txBody>
       </p:sp>
-      <p:pic>
-        <p:nvPicPr>
-          <p:cNvPr id="5" name="Picture 4" descr="s9_img2_gray.png"/>
-          <p:cNvPicPr>
-            <a:picLocks noChangeAspect="1"/>
-          </p:cNvPicPr>
-          <p:nvPr/>
-        </p:nvPicPr>
-        <p:blipFill>
-          <a:blip r:embed="rId2"/>
-          <a:stretch>
-            <a:fillRect/>
-          </a:stretch>
-        </p:blipFill>
-        <p:spPr>
-          <a:xfrm>
-            <a:off x="786384" y="1643502"/>
-            <a:ext cx="6995160" cy="4229363"/>
-          </a:xfrm>
-          <a:prstGeom prst="rect">
-            <a:avLst/>
-          </a:prstGeom>
-        </p:spPr>
-      </p:pic>
-      <p:sp>
-        <p:nvSpPr>
-          <p:cNvPr id="15" name="TextBox 14">
+      <p:sp>
+        <p:nvSpPr>
+          <p:cNvPr id="5" name="TextBox 4"/>
+          <p:cNvSpPr txBox="1"/>
+          <p:nvPr/>
+        </p:nvSpPr>
+        <p:spPr>
+          <a:xfrm>
+            <a:off x="868680" y="1417320"/>
+            <a:ext cx="10424160" cy="2616101"/>
+          </a:xfrm>
+          <a:prstGeom prst="rect">
+            <a:avLst/>
+          </a:prstGeom>
+          <a:noFill/>
+        </p:spPr>
+        <p:txBody>
+          <a:bodyPr wrap="square">
+            <a:spAutoFit/>
+          </a:bodyPr>
+          <a:lstStyle/>
+          <a:p>
+            <a:pPr>
+              <a:spcAft>
+                <a:spcPts val="1200"/>
+              </a:spcAft>
+              <a:defRPr sz="1900">
+                <a:solidFill>
+                  <a:srgbClr val="F5F5F5"/>
+                </a:solidFill>
+                <a:latin typeface="Noto Sans CJK KR"/>
+              </a:defRPr>
+            </a:pPr>
+            <a:r>
+              <a:rPr dirty="0"/>
+              <a:t>• Backbone: </a:t>
+            </a:r>
+            <a:r>
+              <a:rPr lang="en-US" altLang="ko-KR" dirty="0">
+                <a:solidFill>
+                  <a:srgbClr val="FFFFFF"/>
+                </a:solidFill>
+                <a:latin typeface="Malgun Gothic"/>
+              </a:rPr>
+              <a:t>Wide </a:t>
+            </a:r>
+            <a:r>
+              <a:rPr lang="en-US" altLang="ko-KR" dirty="0" err="1">
+                <a:solidFill>
+                  <a:srgbClr val="FFFFFF"/>
+                </a:solidFill>
+                <a:latin typeface="Malgun Gothic"/>
+              </a:rPr>
+              <a:t>ResNet</a:t>
+            </a:r>
+            <a:r>
+              <a:rPr lang="en-US" altLang="ko-KR" dirty="0">
+                <a:solidFill>
+                  <a:srgbClr val="FFFFFF"/>
+                </a:solidFill>
+                <a:latin typeface="Malgun Gothic"/>
+              </a:rPr>
+              <a:t> </a:t>
+            </a:r>
+            <a:r>
+              <a:rPr lang="ko-KR" altLang="en-US" dirty="0">
+                <a:solidFill>
+                  <a:srgbClr val="FFFFFF"/>
+                </a:solidFill>
+                <a:latin typeface="Malgun Gothic"/>
+              </a:rPr>
+              <a:t>기반 </a:t>
+            </a:r>
+            <a:r>
+              <a:rPr lang="en-US" altLang="ko-KR" dirty="0">
+                <a:solidFill>
+                  <a:srgbClr val="FFFFFF"/>
+                </a:solidFill>
+                <a:latin typeface="Malgun Gothic"/>
+              </a:rPr>
+              <a:t>U-Net architecture</a:t>
+            </a:r>
+            <a:endParaRPr dirty="0"/>
+          </a:p>
+          <a:p>
+            <a:pPr>
+              <a:spcAft>
+                <a:spcPts val="1200"/>
+              </a:spcAft>
+              <a:defRPr sz="1900">
+                <a:solidFill>
+                  <a:srgbClr val="F5F5F5"/>
+                </a:solidFill>
+                <a:latin typeface="Noto Sans CJK KR"/>
+              </a:defRPr>
+            </a:pPr>
+            <a:r>
+              <a:rPr dirty="0"/>
+              <a:t>• Timestep </a:t>
+            </a:r>
+            <a:r>
+              <a:rPr lang="en-US" dirty="0"/>
+              <a:t>t</a:t>
+            </a:r>
+            <a:r>
+              <a:rPr lang="ko-KR" altLang="en-US" dirty="0"/>
+              <a:t>는 </a:t>
+            </a:r>
+            <a:r>
+              <a:rPr lang="en-US" dirty="0"/>
+              <a:t>sinusoidal position embedding</a:t>
+            </a:r>
+            <a:r>
+              <a:rPr lang="ko-KR" altLang="en-US" dirty="0"/>
+              <a:t>으로 입력된다</a:t>
+            </a:r>
+            <a:r>
+              <a:rPr lang="en-US" altLang="ko-KR" dirty="0"/>
+              <a:t>.</a:t>
+            </a:r>
+            <a:endParaRPr lang="en-US" dirty="0"/>
+          </a:p>
+          <a:p>
+            <a:pPr>
+              <a:spcAft>
+                <a:spcPts val="1200"/>
+              </a:spcAft>
+              <a:defRPr sz="1900">
+                <a:solidFill>
+                  <a:srgbClr val="F5F5F5"/>
+                </a:solidFill>
+                <a:latin typeface="Noto Sans CJK KR"/>
+              </a:defRPr>
+            </a:pPr>
+            <a:r>
+              <a:rPr dirty="0"/>
+              <a:t>• </a:t>
+            </a:r>
+            <a:r>
+              <a:rPr lang="en-US" dirty="0"/>
+              <a:t>16×16 feature-map resolution</a:t>
+            </a:r>
+            <a:r>
+              <a:rPr lang="ko-KR" altLang="en-US" dirty="0"/>
+              <a:t>에서 </a:t>
+            </a:r>
+            <a:r>
+              <a:rPr lang="en-US" dirty="0"/>
+              <a:t>self-attention</a:t>
+            </a:r>
+            <a:r>
+              <a:rPr lang="ko-KR" altLang="en-US" dirty="0"/>
+              <a:t>을 사용한다</a:t>
+            </a:r>
+            <a:r>
+              <a:rPr lang="en-US" altLang="ko-KR" dirty="0"/>
+              <a:t>.</a:t>
+            </a:r>
+          </a:p>
+          <a:p>
+            <a:pPr>
+              <a:spcAft>
+                <a:spcPts val="1200"/>
+              </a:spcAft>
+              <a:defRPr sz="1900">
+                <a:solidFill>
+                  <a:srgbClr val="F5F5F5"/>
+                </a:solidFill>
+                <a:latin typeface="Noto Sans CJK KR"/>
+              </a:defRPr>
+            </a:pPr>
+            <a:r>
+              <a:rPr lang="en-US" altLang="ko-KR" dirty="0"/>
+              <a:t>• </a:t>
+            </a:r>
+            <a:r>
+              <a:rPr lang="en-US" dirty="0"/>
+              <a:t>Diffusion length: T = 1000.</a:t>
+            </a:r>
+          </a:p>
+          <a:p>
+            <a:pPr>
+              <a:spcAft>
+                <a:spcPts val="1200"/>
+              </a:spcAft>
+              <a:defRPr sz="1900">
+                <a:solidFill>
+                  <a:srgbClr val="F5F5F5"/>
+                </a:solidFill>
+                <a:latin typeface="Noto Sans CJK KR"/>
+              </a:defRPr>
+            </a:pPr>
+            <a:r>
+              <a:rPr dirty="0"/>
+              <a:t>• </a:t>
+            </a:r>
+            <a:r>
+              <a:rPr lang="en-US" dirty="0">
+                <a:solidFill>
+                  <a:srgbClr val="FFFFFF"/>
+                </a:solidFill>
+                <a:latin typeface="Malgun Gothic"/>
+              </a:rPr>
+              <a:t>forward process</a:t>
+            </a:r>
+            <a:r>
+              <a:rPr lang="ko-KR" altLang="en-US" dirty="0">
+                <a:solidFill>
+                  <a:srgbClr val="FFFFFF"/>
+                </a:solidFill>
+                <a:latin typeface="Malgun Gothic"/>
+              </a:rPr>
+              <a:t>의 </a:t>
+            </a:r>
+            <a:r>
+              <a:rPr lang="en-US" altLang="ko-KR" dirty="0">
+                <a:solidFill>
+                  <a:srgbClr val="FFFFFF"/>
+                </a:solidFill>
+                <a:latin typeface="Malgun Gothic"/>
+              </a:rPr>
+              <a:t>variance β₁,…,βT</a:t>
+            </a:r>
+            <a:r>
+              <a:rPr lang="ko-KR" altLang="en-US" dirty="0">
+                <a:solidFill>
+                  <a:srgbClr val="FFFFFF"/>
+                </a:solidFill>
+                <a:latin typeface="Malgun Gothic"/>
+              </a:rPr>
+              <a:t>는 </a:t>
+            </a:r>
+            <a:r>
+              <a:rPr lang="en-US" altLang="ko-KR" dirty="0">
+                <a:solidFill>
+                  <a:srgbClr val="FFFFFF"/>
+                </a:solidFill>
+                <a:latin typeface="Malgun Gothic"/>
+              </a:rPr>
+              <a:t>10⁻⁴</a:t>
+            </a:r>
+            <a:r>
+              <a:rPr lang="ko-KR" altLang="en-US" dirty="0">
+                <a:solidFill>
+                  <a:srgbClr val="FFFFFF"/>
+                </a:solidFill>
+                <a:latin typeface="Malgun Gothic"/>
+              </a:rPr>
+              <a:t>에서 </a:t>
+            </a:r>
+            <a:r>
+              <a:rPr lang="en-US" altLang="ko-KR" dirty="0">
+                <a:solidFill>
+                  <a:srgbClr val="FFFFFF"/>
+                </a:solidFill>
+                <a:latin typeface="Malgun Gothic"/>
+              </a:rPr>
+              <a:t>0.02</a:t>
+            </a:r>
+            <a:r>
+              <a:rPr lang="ko-KR" altLang="en-US" dirty="0">
+                <a:solidFill>
+                  <a:srgbClr val="FFFFFF"/>
+                </a:solidFill>
+                <a:latin typeface="Malgun Gothic"/>
+              </a:rPr>
+              <a:t>까지 선형적으로 증가하는 고정 상수이다</a:t>
+            </a:r>
+            <a:endParaRPr lang="en-US" dirty="0"/>
+          </a:p>
+          <a:p>
+            <a:pPr>
+              <a:spcAft>
+                <a:spcPts val="1200"/>
+              </a:spcAft>
+              <a:defRPr sz="1900">
+                <a:solidFill>
+                  <a:srgbClr val="F5F5F5"/>
+                </a:solidFill>
+                <a:latin typeface="Noto Sans CJK KR"/>
+              </a:defRPr>
+            </a:pPr>
+            <a:r>
+              <a:rPr dirty="0"/>
+              <a:t>• </a:t>
+            </a:r>
+            <a:r>
+              <a:rPr lang="ko-KR" altLang="en-US" dirty="0"/>
+              <a:t>실험에서는 </a:t>
+            </a:r>
+            <a:r>
+              <a:rPr lang="en-US" altLang="ko-KR" dirty="0"/>
+              <a:t>reverse</a:t>
+            </a:r>
+            <a:r>
+              <a:rPr lang="ko-KR" altLang="en-US" dirty="0"/>
+              <a:t> </a:t>
+            </a:r>
+            <a:r>
+              <a:rPr lang="en-US" altLang="ko-KR" dirty="0"/>
+              <a:t>process</a:t>
+            </a:r>
+            <a:r>
+              <a:rPr lang="ko-KR" altLang="en-US" dirty="0"/>
+              <a:t>의 분산을 학습하지 않고</a:t>
+            </a:r>
+            <a:r>
+              <a:rPr lang="en-US" altLang="ko-KR" dirty="0"/>
+              <a:t>, t</a:t>
+            </a:r>
+            <a:r>
+              <a:rPr lang="ko-KR" altLang="en-US" dirty="0"/>
+              <a:t>에 따라 미리 정해진 상수로 설정한다</a:t>
+            </a:r>
+            <a:r>
+              <a:rPr lang="en-US" altLang="ko-KR" dirty="0"/>
+              <a:t>.</a:t>
+            </a:r>
+            <a:endParaRPr dirty="0"/>
+          </a:p>
+        </p:txBody>
+      </p:sp>
+      <p:sp>
+        <p:nvSpPr>
+          <p:cNvPr id="6" name="TextBox 5"/>
+          <p:cNvSpPr txBox="1"/>
+          <p:nvPr/>
+        </p:nvSpPr>
+        <p:spPr>
+          <a:xfrm>
+            <a:off x="868680" y="5806440"/>
+            <a:ext cx="10332720" cy="369332"/>
+          </a:xfrm>
+          <a:prstGeom prst="rect">
+            <a:avLst/>
+          </a:prstGeom>
+          <a:noFill/>
+        </p:spPr>
+        <p:txBody>
+          <a:bodyPr wrap="square" anchor="t">
+            <a:spAutoFit/>
+          </a:bodyPr>
+          <a:lstStyle/>
+          <a:p>
+            <a:pPr>
+              <a:defRPr sz="1800" b="0">
+                <a:solidFill>
+                  <a:srgbClr val="B4B4B4"/>
+                </a:solidFill>
+                <a:latin typeface="Noto Sans CJK KR"/>
+              </a:defRPr>
+            </a:pPr>
+            <a:r>
+              <a:rPr lang="en-US" altLang="ko-KR" dirty="0">
+                <a:solidFill>
+                  <a:srgbClr val="FFFFFF"/>
+                </a:solidFill>
+                <a:latin typeface="Malgun Gothic"/>
+              </a:rPr>
+              <a:t>Network output</a:t>
+            </a:r>
+            <a:r>
+              <a:rPr lang="ko-KR" altLang="en-US" dirty="0">
+                <a:solidFill>
+                  <a:srgbClr val="FFFFFF"/>
+                </a:solidFill>
+                <a:latin typeface="Malgun Gothic"/>
+              </a:rPr>
+              <a:t>은 </a:t>
+            </a:r>
+            <a:r>
+              <a:rPr lang="en-US" altLang="ko-KR" dirty="0">
+                <a:solidFill>
+                  <a:srgbClr val="FFFFFF"/>
+                </a:solidFill>
+                <a:latin typeface="Malgun Gothic"/>
+              </a:rPr>
+              <a:t>xₜ</a:t>
+            </a:r>
+            <a:r>
+              <a:rPr lang="ko-KR" altLang="en-US" dirty="0">
+                <a:solidFill>
+                  <a:srgbClr val="FFFFFF"/>
+                </a:solidFill>
+                <a:latin typeface="Malgun Gothic"/>
+              </a:rPr>
+              <a:t>와 같은 차원을 가지며 </a:t>
+            </a:r>
+            <a:r>
+              <a:rPr lang="en-US" altLang="ko-KR" dirty="0" err="1">
+                <a:solidFill>
+                  <a:srgbClr val="FFFFFF"/>
+                </a:solidFill>
+                <a:latin typeface="Malgun Gothic"/>
+              </a:rPr>
+              <a:t>εθ</a:t>
+            </a:r>
+            <a:r>
+              <a:rPr lang="en-US" altLang="ko-KR" dirty="0">
+                <a:solidFill>
+                  <a:srgbClr val="FFFFFF"/>
+                </a:solidFill>
+                <a:latin typeface="Malgun Gothic"/>
+              </a:rPr>
+              <a:t>(</a:t>
+            </a:r>
+            <a:r>
+              <a:rPr lang="en-US" altLang="ko-KR" dirty="0" err="1">
+                <a:solidFill>
+                  <a:srgbClr val="FFFFFF"/>
+                </a:solidFill>
+                <a:latin typeface="Malgun Gothic"/>
+              </a:rPr>
+              <a:t>xₜ,t</a:t>
+            </a:r>
+            <a:r>
+              <a:rPr lang="en-US" altLang="ko-KR" dirty="0">
+                <a:solidFill>
+                  <a:srgbClr val="FFFFFF"/>
+                </a:solidFill>
+                <a:latin typeface="Malgun Gothic"/>
+              </a:rPr>
+              <a:t>)</a:t>
+            </a:r>
+            <a:r>
+              <a:rPr lang="ko-KR" altLang="en-US" dirty="0">
+                <a:solidFill>
+                  <a:srgbClr val="FFFFFF"/>
+                </a:solidFill>
+                <a:latin typeface="Malgun Gothic"/>
+              </a:rPr>
+              <a:t>를 나타낸다</a:t>
+            </a:r>
+            <a:r>
+              <a:rPr lang="en-US" altLang="ko-KR" dirty="0">
+                <a:solidFill>
+                  <a:srgbClr val="FFFFFF"/>
+                </a:solidFill>
+                <a:latin typeface="Malgun Gothic"/>
+              </a:rPr>
+              <a:t>.</a:t>
+            </a:r>
+          </a:p>
+        </p:txBody>
+      </p:sp>
+      <p:sp>
+        <p:nvSpPr>
+          <p:cNvPr id="9" name="TextBox 8">
             <a:extLst>
               <a:ext uri="{FF2B5EF4-FFF2-40B4-BE49-F238E27FC236}">
-                <a16:creationId xmlns:a16="http://schemas.microsoft.com/office/drawing/2014/main" id="{EB7B7F35-B978-674C-78E6-DCB85F1106F0}"/>
+                <a16:creationId xmlns:a16="http://schemas.microsoft.com/office/drawing/2014/main" id="{C08C5AFE-30BC-CB80-7BDF-69E7DB39BEC0}"/>
               </a:ext>
             </a:extLst>
           </p:cNvPr>
@@ -4580,444 +4864,6 @@
               <a:t>AIResearchers</a:t>
             </a:r>
             <a:endParaRPr dirty="0"/>
-          </a:p>
-        </p:txBody>
-      </p:sp>
-      <p:sp>
-        <p:nvSpPr>
-          <p:cNvPr id="17" name="TextBox 16">
-            <a:extLst>
-              <a:ext uri="{FF2B5EF4-FFF2-40B4-BE49-F238E27FC236}">
-                <a16:creationId xmlns:a16="http://schemas.microsoft.com/office/drawing/2014/main" id="{5CFCF9E7-4889-B606-FBC5-B8641E4D349D}"/>
-              </a:ext>
-            </a:extLst>
-          </p:cNvPr>
-          <p:cNvSpPr txBox="1"/>
-          <p:nvPr/>
-        </p:nvSpPr>
-        <p:spPr>
-          <a:xfrm>
-            <a:off x="8229600" y="1760220"/>
-            <a:ext cx="2286000" cy="320040"/>
-          </a:xfrm>
-          <a:prstGeom prst="rect">
-            <a:avLst/>
-          </a:prstGeom>
-          <a:noFill/>
-        </p:spPr>
-        <p:txBody>
-          <a:bodyPr wrap="square" anchor="t">
-            <a:spAutoFit/>
-          </a:bodyPr>
-          <a:lstStyle/>
-          <a:p>
-            <a:pPr algn="l">
-              <a:spcAft>
-                <a:spcPts val="0"/>
-              </a:spcAft>
-              <a:defRPr sz="1600" b="1">
-                <a:solidFill>
-                  <a:srgbClr val="B4B4B4"/>
-                </a:solidFill>
-                <a:latin typeface="Noto Sans CJK KR"/>
-              </a:defRPr>
-            </a:pPr>
-            <a:r>
-              <a:rPr dirty="0">
-                <a:solidFill>
-                  <a:srgbClr val="FFFFFF"/>
-                </a:solidFill>
-                <a:latin typeface="Malgun Gothic"/>
-              </a:rPr>
-              <a:t>CIFAR-10</a:t>
-            </a:r>
-          </a:p>
-        </p:txBody>
-      </p:sp>
-      <p:sp>
-        <p:nvSpPr>
-          <p:cNvPr id="19" name="TextBox 18">
-            <a:extLst>
-              <a:ext uri="{FF2B5EF4-FFF2-40B4-BE49-F238E27FC236}">
-                <a16:creationId xmlns:a16="http://schemas.microsoft.com/office/drawing/2014/main" id="{1BA75054-C99A-01A6-4B00-CF580CF040C5}"/>
-              </a:ext>
-            </a:extLst>
-          </p:cNvPr>
-          <p:cNvSpPr txBox="1"/>
-          <p:nvPr/>
-        </p:nvSpPr>
-        <p:spPr>
-          <a:xfrm>
-            <a:off x="8229600" y="2272284"/>
-            <a:ext cx="2468880" cy="310896"/>
-          </a:xfrm>
-          <a:prstGeom prst="rect">
-            <a:avLst/>
-          </a:prstGeom>
-          <a:noFill/>
-        </p:spPr>
-        <p:txBody>
-          <a:bodyPr wrap="square" anchor="t">
-            <a:spAutoFit/>
-          </a:bodyPr>
-          <a:lstStyle/>
-          <a:p>
-            <a:pPr algn="l">
-              <a:spcAft>
-                <a:spcPts val="0"/>
-              </a:spcAft>
-              <a:defRPr sz="1500" b="0">
-                <a:solidFill>
-                  <a:srgbClr val="B4B4B4"/>
-                </a:solidFill>
-                <a:latin typeface="Noto Sans CJK KR"/>
-              </a:defRPr>
-            </a:pPr>
-            <a:r>
-              <a:rPr>
-                <a:solidFill>
-                  <a:srgbClr val="FFFFFF"/>
-                </a:solidFill>
-                <a:latin typeface="Malgun Gothic"/>
-              </a:rPr>
-              <a:t>Inception Score</a:t>
-            </a:r>
-          </a:p>
-        </p:txBody>
-      </p:sp>
-      <p:sp>
-        <p:nvSpPr>
-          <p:cNvPr id="21" name="TextBox 20">
-            <a:extLst>
-              <a:ext uri="{FF2B5EF4-FFF2-40B4-BE49-F238E27FC236}">
-                <a16:creationId xmlns:a16="http://schemas.microsoft.com/office/drawing/2014/main" id="{B8021BC3-1B1B-BF7A-444B-95A544DC7503}"/>
-              </a:ext>
-            </a:extLst>
-          </p:cNvPr>
-          <p:cNvSpPr txBox="1"/>
-          <p:nvPr/>
-        </p:nvSpPr>
-        <p:spPr>
-          <a:xfrm>
-            <a:off x="8229600" y="2583180"/>
-            <a:ext cx="2286000" cy="475488"/>
-          </a:xfrm>
-          <a:prstGeom prst="rect">
-            <a:avLst/>
-          </a:prstGeom>
-          <a:noFill/>
-        </p:spPr>
-        <p:txBody>
-          <a:bodyPr wrap="square" anchor="t">
-            <a:spAutoFit/>
-          </a:bodyPr>
-          <a:lstStyle/>
-          <a:p>
-            <a:pPr algn="l">
-              <a:spcAft>
-                <a:spcPts val="0"/>
-              </a:spcAft>
-              <a:defRPr sz="2900" b="1">
-                <a:solidFill>
-                  <a:srgbClr val="F5F5F5"/>
-                </a:solidFill>
-                <a:latin typeface="Noto Sans CJK KR"/>
-              </a:defRPr>
-            </a:pPr>
-            <a:r>
-              <a:rPr>
-                <a:solidFill>
-                  <a:srgbClr val="FFFFFF"/>
-                </a:solidFill>
-                <a:latin typeface="Malgun Gothic"/>
-              </a:rPr>
-              <a:t>9.46</a:t>
-            </a:r>
-          </a:p>
-        </p:txBody>
-      </p:sp>
-      <p:sp>
-        <p:nvSpPr>
-          <p:cNvPr id="23" name="TextBox 22">
-            <a:extLst>
-              <a:ext uri="{FF2B5EF4-FFF2-40B4-BE49-F238E27FC236}">
-                <a16:creationId xmlns:a16="http://schemas.microsoft.com/office/drawing/2014/main" id="{CE90406C-617E-CDD5-2CD9-50192370DDF8}"/>
-              </a:ext>
-            </a:extLst>
-          </p:cNvPr>
-          <p:cNvSpPr txBox="1"/>
-          <p:nvPr/>
-        </p:nvSpPr>
-        <p:spPr>
-          <a:xfrm>
-            <a:off x="8229600" y="3342132"/>
-            <a:ext cx="1828800" cy="310896"/>
-          </a:xfrm>
-          <a:prstGeom prst="rect">
-            <a:avLst/>
-          </a:prstGeom>
-          <a:noFill/>
-        </p:spPr>
-        <p:txBody>
-          <a:bodyPr wrap="square" anchor="t">
-            <a:spAutoFit/>
-          </a:bodyPr>
-          <a:lstStyle/>
-          <a:p>
-            <a:pPr algn="l">
-              <a:spcAft>
-                <a:spcPts val="0"/>
-              </a:spcAft>
-              <a:defRPr sz="1500" b="0">
-                <a:solidFill>
-                  <a:srgbClr val="B4B4B4"/>
-                </a:solidFill>
-                <a:latin typeface="Noto Sans CJK KR"/>
-              </a:defRPr>
-            </a:pPr>
-            <a:r>
-              <a:rPr>
-                <a:solidFill>
-                  <a:srgbClr val="FFFFFF"/>
-                </a:solidFill>
-                <a:latin typeface="Malgun Gothic"/>
-              </a:rPr>
-              <a:t>FID</a:t>
-            </a:r>
-          </a:p>
-        </p:txBody>
-      </p:sp>
-      <p:sp>
-        <p:nvSpPr>
-          <p:cNvPr id="25" name="TextBox 24">
-            <a:extLst>
-              <a:ext uri="{FF2B5EF4-FFF2-40B4-BE49-F238E27FC236}">
-                <a16:creationId xmlns:a16="http://schemas.microsoft.com/office/drawing/2014/main" id="{6605C762-78C4-039B-63ED-E6D8419A2725}"/>
-              </a:ext>
-            </a:extLst>
-          </p:cNvPr>
-          <p:cNvSpPr txBox="1"/>
-          <p:nvPr/>
-        </p:nvSpPr>
-        <p:spPr>
-          <a:xfrm>
-            <a:off x="8229600" y="3653028"/>
-            <a:ext cx="2286000" cy="475488"/>
-          </a:xfrm>
-          <a:prstGeom prst="rect">
-            <a:avLst/>
-          </a:prstGeom>
-          <a:noFill/>
-        </p:spPr>
-        <p:txBody>
-          <a:bodyPr wrap="square" anchor="t">
-            <a:spAutoFit/>
-          </a:bodyPr>
-          <a:lstStyle/>
-          <a:p>
-            <a:pPr algn="l">
-              <a:spcAft>
-                <a:spcPts val="0"/>
-              </a:spcAft>
-              <a:defRPr sz="2900" b="1">
-                <a:solidFill>
-                  <a:srgbClr val="F5F5F5"/>
-                </a:solidFill>
-                <a:latin typeface="Noto Sans CJK KR"/>
-              </a:defRPr>
-            </a:pPr>
-            <a:r>
-              <a:rPr>
-                <a:solidFill>
-                  <a:srgbClr val="FFFFFF"/>
-                </a:solidFill>
-                <a:latin typeface="Malgun Gothic"/>
-              </a:rPr>
-              <a:t>3.17</a:t>
-            </a:r>
-          </a:p>
-        </p:txBody>
-      </p:sp>
-      <p:sp>
-        <p:nvSpPr>
-          <p:cNvPr id="27" name="TextBox 26">
-            <a:extLst>
-              <a:ext uri="{FF2B5EF4-FFF2-40B4-BE49-F238E27FC236}">
-                <a16:creationId xmlns:a16="http://schemas.microsoft.com/office/drawing/2014/main" id="{F79D4A9A-040F-43BE-0779-EB305769369E}"/>
-              </a:ext>
-            </a:extLst>
-          </p:cNvPr>
-          <p:cNvSpPr txBox="1"/>
-          <p:nvPr/>
-        </p:nvSpPr>
-        <p:spPr>
-          <a:xfrm>
-            <a:off x="8229600" y="4530852"/>
-            <a:ext cx="2560320" cy="320040"/>
-          </a:xfrm>
-          <a:prstGeom prst="rect">
-            <a:avLst/>
-          </a:prstGeom>
-          <a:noFill/>
-        </p:spPr>
-        <p:txBody>
-          <a:bodyPr wrap="square" anchor="t">
-            <a:spAutoFit/>
-          </a:bodyPr>
-          <a:lstStyle/>
-          <a:p>
-            <a:pPr algn="l">
-              <a:spcAft>
-                <a:spcPts val="0"/>
-              </a:spcAft>
-              <a:defRPr sz="1600" b="1">
-                <a:solidFill>
-                  <a:srgbClr val="B4B4B4"/>
-                </a:solidFill>
-                <a:latin typeface="Noto Sans CJK KR"/>
-              </a:defRPr>
-            </a:pPr>
-            <a:r>
-              <a:rPr>
-                <a:solidFill>
-                  <a:srgbClr val="FFFFFF"/>
-                </a:solidFill>
-                <a:latin typeface="Malgun Gothic"/>
-              </a:rPr>
-              <a:t>LSUN 256×256</a:t>
-            </a:r>
-          </a:p>
-        </p:txBody>
-      </p:sp>
-      <p:sp>
-        <p:nvSpPr>
-          <p:cNvPr id="29" name="TextBox 28">
-            <a:extLst>
-              <a:ext uri="{FF2B5EF4-FFF2-40B4-BE49-F238E27FC236}">
-                <a16:creationId xmlns:a16="http://schemas.microsoft.com/office/drawing/2014/main" id="{A6CD2078-1475-B489-5F35-1547E6B4E1AB}"/>
-              </a:ext>
-            </a:extLst>
-          </p:cNvPr>
-          <p:cNvSpPr txBox="1"/>
-          <p:nvPr/>
-        </p:nvSpPr>
-        <p:spPr>
-          <a:xfrm>
-            <a:off x="8229599" y="4942332"/>
-            <a:ext cx="3423557" cy="646331"/>
-          </a:xfrm>
-          <a:prstGeom prst="rect">
-            <a:avLst/>
-          </a:prstGeom>
-          <a:noFill/>
-        </p:spPr>
-        <p:txBody>
-          <a:bodyPr wrap="square" anchor="t">
-            <a:spAutoFit/>
-          </a:bodyPr>
-          <a:lstStyle/>
-          <a:p>
-            <a:pPr algn="l">
-              <a:spcAft>
-                <a:spcPts val="0"/>
-              </a:spcAft>
-              <a:defRPr sz="1800" b="0">
-                <a:solidFill>
-                  <a:srgbClr val="F5F5F5"/>
-                </a:solidFill>
-                <a:latin typeface="Noto Sans CJK KR"/>
-              </a:defRPr>
-            </a:pPr>
-            <a:r>
-              <a:rPr dirty="0" err="1">
-                <a:solidFill>
-                  <a:srgbClr val="FFFFFF"/>
-                </a:solidFill>
-                <a:latin typeface="Malgun Gothic"/>
-              </a:rPr>
-              <a:t>ProgressiveGAN과</a:t>
-            </a:r>
-            <a:r>
-              <a:rPr dirty="0">
-                <a:solidFill>
-                  <a:srgbClr val="FFFFFF"/>
-                </a:solidFill>
-                <a:latin typeface="Malgun Gothic"/>
-              </a:rPr>
-              <a:t> </a:t>
-            </a:r>
-            <a:r>
-              <a:rPr dirty="0" err="1">
-                <a:solidFill>
-                  <a:srgbClr val="FFFFFF"/>
-                </a:solidFill>
-                <a:latin typeface="Malgun Gothic"/>
-              </a:rPr>
-              <a:t>비교</a:t>
-            </a:r>
-            <a:r>
-              <a:rPr dirty="0">
-                <a:solidFill>
-                  <a:srgbClr val="FFFFFF"/>
-                </a:solidFill>
-                <a:latin typeface="Malgun Gothic"/>
-              </a:rPr>
-              <a:t> </a:t>
-            </a:r>
-            <a:r>
-              <a:rPr dirty="0" err="1">
-                <a:solidFill>
-                  <a:srgbClr val="FFFFFF"/>
-                </a:solidFill>
-                <a:latin typeface="Malgun Gothic"/>
-              </a:rPr>
-              <a:t>가능한</a:t>
-            </a:r>
-            <a:r>
-              <a:rPr dirty="0">
-                <a:solidFill>
-                  <a:srgbClr val="FFFFFF"/>
-                </a:solidFill>
-                <a:latin typeface="Malgun Gothic"/>
-              </a:rPr>
-              <a:t> sample </a:t>
-            </a:r>
-            <a:r>
-              <a:rPr dirty="0" err="1">
-                <a:solidFill>
-                  <a:srgbClr val="FFFFFF"/>
-                </a:solidFill>
-                <a:latin typeface="Malgun Gothic"/>
-              </a:rPr>
-              <a:t>quality를</a:t>
-            </a:r>
-            <a:r>
-              <a:rPr dirty="0">
-                <a:solidFill>
-                  <a:srgbClr val="FFFFFF"/>
-                </a:solidFill>
-                <a:latin typeface="Malgun Gothic"/>
-              </a:rPr>
-              <a:t> </a:t>
-            </a:r>
-            <a:r>
-              <a:rPr dirty="0" err="1">
-                <a:solidFill>
-                  <a:srgbClr val="FFFFFF"/>
-                </a:solidFill>
-                <a:latin typeface="Malgun Gothic"/>
-              </a:rPr>
-              <a:t>보였다</a:t>
-            </a:r>
-            <a:r>
-              <a:rPr dirty="0">
-                <a:solidFill>
-                  <a:srgbClr val="FFFFFF"/>
-                </a:solidFill>
-                <a:latin typeface="Malgun Gothic"/>
-              </a:rPr>
-              <a:t>.</a:t>
-            </a:r>
           </a:p>
         </p:txBody>
       </p:sp>
@@ -5063,6 +4909,665 @@
         <p:spPr>
           <a:xfrm>
             <a:off x="713232" y="438912"/>
+            <a:ext cx="10698480" cy="566928"/>
+          </a:xfrm>
+          <a:prstGeom prst="rect">
+            <a:avLst/>
+          </a:prstGeom>
+          <a:noFill/>
+        </p:spPr>
+        <p:txBody>
+          <a:bodyPr wrap="none">
+            <a:spAutoFit/>
+          </a:bodyPr>
+          <a:lstStyle/>
+          <a:p>
+            <a:pPr>
+              <a:defRPr sz="3100" b="1">
+                <a:solidFill>
+                  <a:srgbClr val="F5F5F5"/>
+                </a:solidFill>
+                <a:latin typeface="Noto Sans CJK KR"/>
+              </a:defRPr>
+            </a:pPr>
+            <a:r>
+              <a:t>Experiments</a:t>
+            </a:r>
+          </a:p>
+        </p:txBody>
+      </p:sp>
+      <p:sp>
+        <p:nvSpPr>
+          <p:cNvPr id="3" name="TextBox 2"/>
+          <p:cNvSpPr txBox="1"/>
+          <p:nvPr/>
+        </p:nvSpPr>
+        <p:spPr>
+          <a:xfrm>
+            <a:off x="11064240" y="484632"/>
+            <a:ext cx="457200" cy="365760"/>
+          </a:xfrm>
+          <a:prstGeom prst="rect">
+            <a:avLst/>
+          </a:prstGeom>
+          <a:noFill/>
+        </p:spPr>
+        <p:txBody>
+          <a:bodyPr wrap="none">
+            <a:spAutoFit/>
+          </a:bodyPr>
+          <a:lstStyle/>
+          <a:p>
+            <a:pPr algn="r">
+              <a:defRPr sz="1300">
+                <a:solidFill>
+                  <a:srgbClr val="5F5F5F"/>
+                </a:solidFill>
+                <a:latin typeface="Noto Sans CJK KR"/>
+              </a:defRPr>
+            </a:pPr>
+            <a:r>
+              <a:t>11</a:t>
+            </a:r>
+          </a:p>
+        </p:txBody>
+      </p:sp>
+      <p:sp>
+        <p:nvSpPr>
+          <p:cNvPr id="4" name="Rectangle 3"/>
+          <p:cNvSpPr/>
+          <p:nvPr/>
+        </p:nvSpPr>
+        <p:spPr>
+          <a:xfrm>
+            <a:off x="731520" y="1143000"/>
+            <a:ext cx="10744200" cy="10972"/>
+          </a:xfrm>
+          <a:prstGeom prst="rect">
+            <a:avLst/>
+          </a:prstGeom>
+          <a:solidFill>
+            <a:srgbClr val="5F5F5F"/>
+          </a:solidFill>
+          <a:ln>
+            <a:noFill/>
+          </a:ln>
+        </p:spPr>
+        <p:style>
+          <a:lnRef idx="1">
+            <a:schemeClr val="accent1"/>
+          </a:lnRef>
+          <a:fillRef idx="3">
+            <a:schemeClr val="accent1"/>
+          </a:fillRef>
+          <a:effectRef idx="2">
+            <a:schemeClr val="accent1"/>
+          </a:effectRef>
+          <a:fontRef idx="minor">
+            <a:schemeClr val="lt1"/>
+          </a:fontRef>
+        </p:style>
+        <p:txBody>
+          <a:bodyPr rtlCol="0" anchor="ctr"/>
+          <a:lstStyle/>
+          <a:p>
+            <a:pPr algn="ctr"/>
+            <a:endParaRPr/>
+          </a:p>
+        </p:txBody>
+      </p:sp>
+      <p:pic>
+        <p:nvPicPr>
+          <p:cNvPr id="5" name="Picture 4" descr="s9_img2_gray.png"/>
+          <p:cNvPicPr>
+            <a:picLocks noChangeAspect="1"/>
+          </p:cNvPicPr>
+          <p:nvPr/>
+        </p:nvPicPr>
+        <p:blipFill>
+          <a:blip r:embed="rId2"/>
+          <a:stretch>
+            <a:fillRect/>
+          </a:stretch>
+        </p:blipFill>
+        <p:spPr>
+          <a:xfrm>
+            <a:off x="786384" y="1643502"/>
+            <a:ext cx="6995160" cy="4229363"/>
+          </a:xfrm>
+          <a:prstGeom prst="rect">
+            <a:avLst/>
+          </a:prstGeom>
+        </p:spPr>
+      </p:pic>
+      <p:sp>
+        <p:nvSpPr>
+          <p:cNvPr id="15" name="TextBox 14">
+            <a:extLst>
+              <a:ext uri="{FF2B5EF4-FFF2-40B4-BE49-F238E27FC236}">
+                <a16:creationId xmlns:a16="http://schemas.microsoft.com/office/drawing/2014/main" id="{EB7B7F35-B978-674C-78E6-DCB85F1106F0}"/>
+              </a:ext>
+            </a:extLst>
+          </p:cNvPr>
+          <p:cNvSpPr txBox="1"/>
+          <p:nvPr/>
+        </p:nvSpPr>
+        <p:spPr>
+          <a:xfrm>
+            <a:off x="731520" y="6510528"/>
+            <a:ext cx="6217920" cy="230832"/>
+          </a:xfrm>
+          <a:prstGeom prst="rect">
+            <a:avLst/>
+          </a:prstGeom>
+          <a:noFill/>
+        </p:spPr>
+        <p:txBody>
+          <a:bodyPr wrap="square" anchor="t">
+            <a:spAutoFit/>
+          </a:bodyPr>
+          <a:lstStyle/>
+          <a:p>
+            <a:pPr>
+              <a:defRPr sz="900" b="0">
+                <a:solidFill>
+                  <a:srgbClr val="5F5F5F"/>
+                </a:solidFill>
+                <a:latin typeface="Noto Sans CJK KR"/>
+              </a:defRPr>
+            </a:pPr>
+            <a:r>
+              <a:rPr lang="en-US" dirty="0"/>
+              <a:t>AID2026_2_Study / </a:t>
+            </a:r>
+            <a:r>
+              <a:rPr lang="en-US" dirty="0" err="1"/>
+              <a:t>AIResearchers</a:t>
+            </a:r>
+            <a:endParaRPr dirty="0"/>
+          </a:p>
+        </p:txBody>
+      </p:sp>
+      <p:sp>
+        <p:nvSpPr>
+          <p:cNvPr id="17" name="TextBox 16">
+            <a:extLst>
+              <a:ext uri="{FF2B5EF4-FFF2-40B4-BE49-F238E27FC236}">
+                <a16:creationId xmlns:a16="http://schemas.microsoft.com/office/drawing/2014/main" id="{5CFCF9E7-4889-B606-FBC5-B8641E4D349D}"/>
+              </a:ext>
+            </a:extLst>
+          </p:cNvPr>
+          <p:cNvSpPr txBox="1"/>
+          <p:nvPr/>
+        </p:nvSpPr>
+        <p:spPr>
+          <a:xfrm>
+            <a:off x="8229600" y="1760220"/>
+            <a:ext cx="2286000" cy="320040"/>
+          </a:xfrm>
+          <a:prstGeom prst="rect">
+            <a:avLst/>
+          </a:prstGeom>
+          <a:noFill/>
+        </p:spPr>
+        <p:txBody>
+          <a:bodyPr wrap="square" anchor="t">
+            <a:spAutoFit/>
+          </a:bodyPr>
+          <a:lstStyle/>
+          <a:p>
+            <a:pPr algn="l">
+              <a:spcAft>
+                <a:spcPts val="0"/>
+              </a:spcAft>
+              <a:defRPr sz="1600" b="1">
+                <a:solidFill>
+                  <a:srgbClr val="B4B4B4"/>
+                </a:solidFill>
+                <a:latin typeface="Noto Sans CJK KR"/>
+              </a:defRPr>
+            </a:pPr>
+            <a:r>
+              <a:rPr dirty="0">
+                <a:solidFill>
+                  <a:srgbClr val="FFFFFF"/>
+                </a:solidFill>
+                <a:latin typeface="Malgun Gothic"/>
+              </a:rPr>
+              <a:t>CIFAR-10</a:t>
+            </a:r>
+          </a:p>
+        </p:txBody>
+      </p:sp>
+      <p:sp>
+        <p:nvSpPr>
+          <p:cNvPr id="19" name="TextBox 18">
+            <a:extLst>
+              <a:ext uri="{FF2B5EF4-FFF2-40B4-BE49-F238E27FC236}">
+                <a16:creationId xmlns:a16="http://schemas.microsoft.com/office/drawing/2014/main" id="{1BA75054-C99A-01A6-4B00-CF580CF040C5}"/>
+              </a:ext>
+            </a:extLst>
+          </p:cNvPr>
+          <p:cNvSpPr txBox="1"/>
+          <p:nvPr/>
+        </p:nvSpPr>
+        <p:spPr>
+          <a:xfrm>
+            <a:off x="8229600" y="2272284"/>
+            <a:ext cx="2468880" cy="310896"/>
+          </a:xfrm>
+          <a:prstGeom prst="rect">
+            <a:avLst/>
+          </a:prstGeom>
+          <a:noFill/>
+        </p:spPr>
+        <p:txBody>
+          <a:bodyPr wrap="square" anchor="t">
+            <a:spAutoFit/>
+          </a:bodyPr>
+          <a:lstStyle/>
+          <a:p>
+            <a:pPr algn="l">
+              <a:spcAft>
+                <a:spcPts val="0"/>
+              </a:spcAft>
+              <a:defRPr sz="1500" b="0">
+                <a:solidFill>
+                  <a:srgbClr val="B4B4B4"/>
+                </a:solidFill>
+                <a:latin typeface="Noto Sans CJK KR"/>
+              </a:defRPr>
+            </a:pPr>
+            <a:r>
+              <a:rPr>
+                <a:solidFill>
+                  <a:srgbClr val="FFFFFF"/>
+                </a:solidFill>
+                <a:latin typeface="Malgun Gothic"/>
+              </a:rPr>
+              <a:t>Inception Score</a:t>
+            </a:r>
+          </a:p>
+        </p:txBody>
+      </p:sp>
+      <p:sp>
+        <p:nvSpPr>
+          <p:cNvPr id="21" name="TextBox 20">
+            <a:extLst>
+              <a:ext uri="{FF2B5EF4-FFF2-40B4-BE49-F238E27FC236}">
+                <a16:creationId xmlns:a16="http://schemas.microsoft.com/office/drawing/2014/main" id="{B8021BC3-1B1B-BF7A-444B-95A544DC7503}"/>
+              </a:ext>
+            </a:extLst>
+          </p:cNvPr>
+          <p:cNvSpPr txBox="1"/>
+          <p:nvPr/>
+        </p:nvSpPr>
+        <p:spPr>
+          <a:xfrm>
+            <a:off x="8229600" y="2583180"/>
+            <a:ext cx="2286000" cy="475488"/>
+          </a:xfrm>
+          <a:prstGeom prst="rect">
+            <a:avLst/>
+          </a:prstGeom>
+          <a:noFill/>
+        </p:spPr>
+        <p:txBody>
+          <a:bodyPr wrap="square" anchor="t">
+            <a:spAutoFit/>
+          </a:bodyPr>
+          <a:lstStyle/>
+          <a:p>
+            <a:pPr algn="l">
+              <a:spcAft>
+                <a:spcPts val="0"/>
+              </a:spcAft>
+              <a:defRPr sz="2900" b="1">
+                <a:solidFill>
+                  <a:srgbClr val="F5F5F5"/>
+                </a:solidFill>
+                <a:latin typeface="Noto Sans CJK KR"/>
+              </a:defRPr>
+            </a:pPr>
+            <a:r>
+              <a:rPr>
+                <a:solidFill>
+                  <a:srgbClr val="FFFFFF"/>
+                </a:solidFill>
+                <a:latin typeface="Malgun Gothic"/>
+              </a:rPr>
+              <a:t>9.46</a:t>
+            </a:r>
+          </a:p>
+        </p:txBody>
+      </p:sp>
+      <p:sp>
+        <p:nvSpPr>
+          <p:cNvPr id="23" name="TextBox 22">
+            <a:extLst>
+              <a:ext uri="{FF2B5EF4-FFF2-40B4-BE49-F238E27FC236}">
+                <a16:creationId xmlns:a16="http://schemas.microsoft.com/office/drawing/2014/main" id="{CE90406C-617E-CDD5-2CD9-50192370DDF8}"/>
+              </a:ext>
+            </a:extLst>
+          </p:cNvPr>
+          <p:cNvSpPr txBox="1"/>
+          <p:nvPr/>
+        </p:nvSpPr>
+        <p:spPr>
+          <a:xfrm>
+            <a:off x="8229600" y="3342132"/>
+            <a:ext cx="1828800" cy="310896"/>
+          </a:xfrm>
+          <a:prstGeom prst="rect">
+            <a:avLst/>
+          </a:prstGeom>
+          <a:noFill/>
+        </p:spPr>
+        <p:txBody>
+          <a:bodyPr wrap="square" anchor="t">
+            <a:spAutoFit/>
+          </a:bodyPr>
+          <a:lstStyle/>
+          <a:p>
+            <a:pPr algn="l">
+              <a:spcAft>
+                <a:spcPts val="0"/>
+              </a:spcAft>
+              <a:defRPr sz="1500" b="0">
+                <a:solidFill>
+                  <a:srgbClr val="B4B4B4"/>
+                </a:solidFill>
+                <a:latin typeface="Noto Sans CJK KR"/>
+              </a:defRPr>
+            </a:pPr>
+            <a:r>
+              <a:rPr>
+                <a:solidFill>
+                  <a:srgbClr val="FFFFFF"/>
+                </a:solidFill>
+                <a:latin typeface="Malgun Gothic"/>
+              </a:rPr>
+              <a:t>FID</a:t>
+            </a:r>
+          </a:p>
+        </p:txBody>
+      </p:sp>
+      <p:sp>
+        <p:nvSpPr>
+          <p:cNvPr id="25" name="TextBox 24">
+            <a:extLst>
+              <a:ext uri="{FF2B5EF4-FFF2-40B4-BE49-F238E27FC236}">
+                <a16:creationId xmlns:a16="http://schemas.microsoft.com/office/drawing/2014/main" id="{6605C762-78C4-039B-63ED-E6D8419A2725}"/>
+              </a:ext>
+            </a:extLst>
+          </p:cNvPr>
+          <p:cNvSpPr txBox="1"/>
+          <p:nvPr/>
+        </p:nvSpPr>
+        <p:spPr>
+          <a:xfrm>
+            <a:off x="8229600" y="3653028"/>
+            <a:ext cx="2286000" cy="475488"/>
+          </a:xfrm>
+          <a:prstGeom prst="rect">
+            <a:avLst/>
+          </a:prstGeom>
+          <a:noFill/>
+        </p:spPr>
+        <p:txBody>
+          <a:bodyPr wrap="square" anchor="t">
+            <a:spAutoFit/>
+          </a:bodyPr>
+          <a:lstStyle/>
+          <a:p>
+            <a:pPr algn="l">
+              <a:spcAft>
+                <a:spcPts val="0"/>
+              </a:spcAft>
+              <a:defRPr sz="2900" b="1">
+                <a:solidFill>
+                  <a:srgbClr val="F5F5F5"/>
+                </a:solidFill>
+                <a:latin typeface="Noto Sans CJK KR"/>
+              </a:defRPr>
+            </a:pPr>
+            <a:r>
+              <a:rPr>
+                <a:solidFill>
+                  <a:srgbClr val="FFFFFF"/>
+                </a:solidFill>
+                <a:latin typeface="Malgun Gothic"/>
+              </a:rPr>
+              <a:t>3.17</a:t>
+            </a:r>
+          </a:p>
+        </p:txBody>
+      </p:sp>
+      <p:sp>
+        <p:nvSpPr>
+          <p:cNvPr id="27" name="TextBox 26">
+            <a:extLst>
+              <a:ext uri="{FF2B5EF4-FFF2-40B4-BE49-F238E27FC236}">
+                <a16:creationId xmlns:a16="http://schemas.microsoft.com/office/drawing/2014/main" id="{F79D4A9A-040F-43BE-0779-EB305769369E}"/>
+              </a:ext>
+            </a:extLst>
+          </p:cNvPr>
+          <p:cNvSpPr txBox="1"/>
+          <p:nvPr/>
+        </p:nvSpPr>
+        <p:spPr>
+          <a:xfrm>
+            <a:off x="8229600" y="4530852"/>
+            <a:ext cx="2560320" cy="320040"/>
+          </a:xfrm>
+          <a:prstGeom prst="rect">
+            <a:avLst/>
+          </a:prstGeom>
+          <a:noFill/>
+        </p:spPr>
+        <p:txBody>
+          <a:bodyPr wrap="square" anchor="t">
+            <a:spAutoFit/>
+          </a:bodyPr>
+          <a:lstStyle/>
+          <a:p>
+            <a:pPr algn="l">
+              <a:spcAft>
+                <a:spcPts val="0"/>
+              </a:spcAft>
+              <a:defRPr sz="1600" b="1">
+                <a:solidFill>
+                  <a:srgbClr val="B4B4B4"/>
+                </a:solidFill>
+                <a:latin typeface="Noto Sans CJK KR"/>
+              </a:defRPr>
+            </a:pPr>
+            <a:r>
+              <a:rPr>
+                <a:solidFill>
+                  <a:srgbClr val="FFFFFF"/>
+                </a:solidFill>
+                <a:latin typeface="Malgun Gothic"/>
+              </a:rPr>
+              <a:t>LSUN 256×256</a:t>
+            </a:r>
+          </a:p>
+        </p:txBody>
+      </p:sp>
+      <p:sp>
+        <p:nvSpPr>
+          <p:cNvPr id="29" name="TextBox 28">
+            <a:extLst>
+              <a:ext uri="{FF2B5EF4-FFF2-40B4-BE49-F238E27FC236}">
+                <a16:creationId xmlns:a16="http://schemas.microsoft.com/office/drawing/2014/main" id="{A6CD2078-1475-B489-5F35-1547E6B4E1AB}"/>
+              </a:ext>
+            </a:extLst>
+          </p:cNvPr>
+          <p:cNvSpPr txBox="1"/>
+          <p:nvPr/>
+        </p:nvSpPr>
+        <p:spPr>
+          <a:xfrm>
+            <a:off x="8229599" y="4942332"/>
+            <a:ext cx="3423557" cy="646331"/>
+          </a:xfrm>
+          <a:prstGeom prst="rect">
+            <a:avLst/>
+          </a:prstGeom>
+          <a:noFill/>
+        </p:spPr>
+        <p:txBody>
+          <a:bodyPr wrap="square" anchor="t">
+            <a:spAutoFit/>
+          </a:bodyPr>
+          <a:lstStyle/>
+          <a:p>
+            <a:pPr algn="l">
+              <a:spcAft>
+                <a:spcPts val="0"/>
+              </a:spcAft>
+              <a:defRPr sz="1800" b="0">
+                <a:solidFill>
+                  <a:srgbClr val="F5F5F5"/>
+                </a:solidFill>
+                <a:latin typeface="Noto Sans CJK KR"/>
+              </a:defRPr>
+            </a:pPr>
+            <a:r>
+              <a:rPr dirty="0" err="1">
+                <a:solidFill>
+                  <a:srgbClr val="FFFFFF"/>
+                </a:solidFill>
+                <a:latin typeface="Malgun Gothic"/>
+              </a:rPr>
+              <a:t>ProgressiveGAN과</a:t>
+            </a:r>
+            <a:r>
+              <a:rPr dirty="0">
+                <a:solidFill>
+                  <a:srgbClr val="FFFFFF"/>
+                </a:solidFill>
+                <a:latin typeface="Malgun Gothic"/>
+              </a:rPr>
+              <a:t> </a:t>
+            </a:r>
+            <a:r>
+              <a:rPr dirty="0" err="1">
+                <a:solidFill>
+                  <a:srgbClr val="FFFFFF"/>
+                </a:solidFill>
+                <a:latin typeface="Malgun Gothic"/>
+              </a:rPr>
+              <a:t>비교</a:t>
+            </a:r>
+            <a:r>
+              <a:rPr dirty="0">
+                <a:solidFill>
+                  <a:srgbClr val="FFFFFF"/>
+                </a:solidFill>
+                <a:latin typeface="Malgun Gothic"/>
+              </a:rPr>
+              <a:t> </a:t>
+            </a:r>
+            <a:r>
+              <a:rPr dirty="0" err="1">
+                <a:solidFill>
+                  <a:srgbClr val="FFFFFF"/>
+                </a:solidFill>
+                <a:latin typeface="Malgun Gothic"/>
+              </a:rPr>
+              <a:t>가능한</a:t>
+            </a:r>
+            <a:r>
+              <a:rPr dirty="0">
+                <a:solidFill>
+                  <a:srgbClr val="FFFFFF"/>
+                </a:solidFill>
+                <a:latin typeface="Malgun Gothic"/>
+              </a:rPr>
+              <a:t> sample </a:t>
+            </a:r>
+            <a:r>
+              <a:rPr dirty="0" err="1">
+                <a:solidFill>
+                  <a:srgbClr val="FFFFFF"/>
+                </a:solidFill>
+                <a:latin typeface="Malgun Gothic"/>
+              </a:rPr>
+              <a:t>quality를</a:t>
+            </a:r>
+            <a:r>
+              <a:rPr dirty="0">
+                <a:solidFill>
+                  <a:srgbClr val="FFFFFF"/>
+                </a:solidFill>
+                <a:latin typeface="Malgun Gothic"/>
+              </a:rPr>
+              <a:t> </a:t>
+            </a:r>
+            <a:r>
+              <a:rPr dirty="0" err="1">
+                <a:solidFill>
+                  <a:srgbClr val="FFFFFF"/>
+                </a:solidFill>
+                <a:latin typeface="Malgun Gothic"/>
+              </a:rPr>
+              <a:t>보였다</a:t>
+            </a:r>
+            <a:r>
+              <a:rPr dirty="0">
+                <a:solidFill>
+                  <a:srgbClr val="FFFFFF"/>
+                </a:solidFill>
+                <a:latin typeface="Malgun Gothic"/>
+              </a:rPr>
+              <a:t>.</a:t>
+            </a:r>
+          </a:p>
+        </p:txBody>
+      </p:sp>
+    </p:spTree>
+  </p:cSld>
+  <p:clrMapOvr>
+    <a:masterClrMapping/>
+  </p:clrMapOvr>
+</p:sld>
+</file>
+
+<file path=ppt/slides/slide13.xml><?xml version="1.0" encoding="utf-8"?>
+<p:sld xmlns:a="http://schemas.openxmlformats.org/drawingml/2006/main" xmlns:r="http://schemas.openxmlformats.org/officeDocument/2006/relationships" xmlns:p="http://schemas.openxmlformats.org/presentationml/2006/main">
+  <p:cSld>
+    <p:bg>
+      <p:bgPr>
+        <a:solidFill>
+          <a:srgbClr val="000000"/>
+        </a:solidFill>
+        <a:effectLst/>
+      </p:bgPr>
+    </p:bg>
+    <p:spTree>
+      <p:nvGrpSpPr>
+        <p:cNvPr id="1" name=""/>
+        <p:cNvGrpSpPr/>
+        <p:nvPr/>
+      </p:nvGrpSpPr>
+      <p:grpSpPr>
+        <a:xfrm>
+          <a:off x="0" y="0"/>
+          <a:ext cx="0" cy="0"/>
+          <a:chOff x="0" y="0"/>
+          <a:chExt cx="0" cy="0"/>
+        </a:xfrm>
+      </p:grpSpPr>
+      <p:sp>
+        <p:nvSpPr>
+          <p:cNvPr id="2" name="TextBox 1"/>
+          <p:cNvSpPr txBox="1"/>
+          <p:nvPr/>
+        </p:nvSpPr>
+        <p:spPr>
+          <a:xfrm>
+            <a:off x="713232" y="438912"/>
             <a:ext cx="4015971" cy="569387"/>
           </a:xfrm>
           <a:prstGeom prst="rect">
@@ -5846,7 +6351,7 @@
         <p:spPr>
           <a:xfrm>
             <a:off x="1664208" y="2916936"/>
-            <a:ext cx="5943600" cy="347472"/>
+            <a:ext cx="5943600" cy="430887"/>
           </a:xfrm>
           <a:prstGeom prst="rect">
             <a:avLst/>
@@ -5859,7 +6364,7 @@
           </a:bodyPr>
           <a:lstStyle/>
           <a:p>
-            <a:pPr algn="l">
+            <a:pPr>
               <a:defRPr sz="2200" b="0">
                 <a:solidFill>
                   <a:srgbClr val="F5F5F5"/>
@@ -5868,7 +6373,16 @@
               </a:defRPr>
             </a:pPr>
             <a:r>
+              <a:rPr dirty="0"/>
               <a:t>Forward Process</a:t>
+            </a:r>
+            <a:r>
+              <a:rPr lang="en-US" dirty="0"/>
+              <a:t> &amp; </a:t>
+            </a:r>
+            <a:r>
+              <a:rPr lang="en-US" altLang="ko-KR" dirty="0"/>
+              <a:t>Reverse Process</a:t>
             </a:r>
           </a:p>
         </p:txBody>
@@ -5918,7 +6432,7 @@
         <p:spPr>
           <a:xfrm>
             <a:off x="1664208" y="3630168"/>
-            <a:ext cx="5943600" cy="347472"/>
+            <a:ext cx="5943600" cy="430887"/>
           </a:xfrm>
           <a:prstGeom prst="rect">
             <a:avLst/>
@@ -5940,8 +6454,10 @@
               </a:defRPr>
             </a:pPr>
             <a:r>
-              <a:t>Reverse Process</a:t>
-            </a:r>
+              <a:rPr lang="en-US" dirty="0"/>
+              <a:t>Training Objective</a:t>
+            </a:r>
+            <a:endParaRPr dirty="0"/>
           </a:p>
         </p:txBody>
       </p:sp>
@@ -8228,7 +8744,13 @@
     </p:bg>
     <p:spTree>
       <p:nvGrpSpPr>
-        <p:cNvPr id="1" name=""/>
+        <p:cNvPr id="1" name="">
+          <a:extLst>
+            <a:ext uri="{FF2B5EF4-FFF2-40B4-BE49-F238E27FC236}">
+              <a16:creationId xmlns:a16="http://schemas.microsoft.com/office/drawing/2014/main" id="{63780CCF-2C06-B57F-5143-52990331A131}"/>
+            </a:ext>
+          </a:extLst>
+        </p:cNvPr>
         <p:cNvGrpSpPr/>
         <p:nvPr/>
       </p:nvGrpSpPr>
@@ -8242,14 +8764,68 @@
       </p:grpSpPr>
       <p:sp>
         <p:nvSpPr>
-          <p:cNvPr id="2" name="TextBox 1"/>
+          <p:cNvPr id="15" name="TextBox 14">
+            <a:extLst>
+              <a:ext uri="{FF2B5EF4-FFF2-40B4-BE49-F238E27FC236}">
+                <a16:creationId xmlns:a16="http://schemas.microsoft.com/office/drawing/2014/main" id="{2C2D318B-7F0E-C7C0-2439-3545F2F69075}"/>
+              </a:ext>
+            </a:extLst>
+          </p:cNvPr>
           <p:cNvSpPr txBox="1"/>
           <p:nvPr/>
         </p:nvSpPr>
         <p:spPr>
           <a:xfrm>
+            <a:off x="731520" y="6510528"/>
+            <a:ext cx="6217920" cy="230832"/>
+          </a:xfrm>
+          <a:prstGeom prst="rect">
+            <a:avLst/>
+          </a:prstGeom>
+          <a:noFill/>
+        </p:spPr>
+        <p:txBody>
+          <a:bodyPr wrap="square" anchor="t">
+            <a:spAutoFit/>
+          </a:bodyPr>
+          <a:lstStyle/>
+          <a:p>
+            <a:pPr>
+              <a:defRPr sz="900" b="0">
+                <a:solidFill>
+                  <a:srgbClr val="5F5F5F"/>
+                </a:solidFill>
+                <a:latin typeface="Noto Sans CJK KR"/>
+              </a:defRPr>
+            </a:pPr>
+            <a:r>
+              <a:rPr lang="en-US" dirty="0"/>
+              <a:t>AID2026_2_Study / </a:t>
+            </a:r>
+            <a:r>
+              <a:rPr lang="en-US" dirty="0" err="1"/>
+              <a:t>AIResearchers</a:t>
+            </a:r>
+            <a:endParaRPr dirty="0"/>
+          </a:p>
+        </p:txBody>
+      </p:sp>
+      <p:sp>
+        <p:nvSpPr>
+          <p:cNvPr id="14" name="TextBox 13">
+            <a:extLst>
+              <a:ext uri="{FF2B5EF4-FFF2-40B4-BE49-F238E27FC236}">
+                <a16:creationId xmlns:a16="http://schemas.microsoft.com/office/drawing/2014/main" id="{7919B54B-A362-8902-26C2-613C859EF556}"/>
+              </a:ext>
+            </a:extLst>
+          </p:cNvPr>
+          <p:cNvSpPr txBox="1"/>
+          <p:nvPr/>
+        </p:nvSpPr>
+        <p:spPr>
+          <a:xfrm>
             <a:off x="713232" y="438912"/>
-            <a:ext cx="10698480" cy="566928"/>
+            <a:ext cx="3288080" cy="584775"/>
           </a:xfrm>
           <a:prstGeom prst="rect">
             <a:avLst/>
@@ -8262,30 +8838,34 @@
           </a:bodyPr>
           <a:lstStyle/>
           <a:p>
-            <a:pPr>
-              <a:defRPr sz="3100" b="1">
+            <a:r>
+              <a:rPr lang="en-US" altLang="ko-KR" sz="3200" b="1" dirty="0">
                 <a:solidFill>
                   <a:srgbClr val="F5F5F5"/>
                 </a:solidFill>
                 <a:latin typeface="Noto Sans CJK KR"/>
-              </a:defRPr>
-            </a:pPr>
-            <a:r>
-              <a:t>Reverse Process</a:t>
-            </a:r>
-          </a:p>
-        </p:txBody>
-      </p:sp>
-      <p:sp>
-        <p:nvSpPr>
-          <p:cNvPr id="3" name="TextBox 2"/>
+              </a:rPr>
+              <a:t>Training Objective</a:t>
+            </a:r>
+          </a:p>
+        </p:txBody>
+      </p:sp>
+      <p:sp>
+        <p:nvSpPr>
+          <p:cNvPr id="17" name="TextBox 16">
+            <a:extLst>
+              <a:ext uri="{FF2B5EF4-FFF2-40B4-BE49-F238E27FC236}">
+                <a16:creationId xmlns:a16="http://schemas.microsoft.com/office/drawing/2014/main" id="{B05F0E5C-06DA-2376-1C42-E80E6D20D978}"/>
+              </a:ext>
+            </a:extLst>
+          </p:cNvPr>
           <p:cNvSpPr txBox="1"/>
           <p:nvPr/>
         </p:nvSpPr>
         <p:spPr>
           <a:xfrm>
             <a:off x="11064240" y="484632"/>
-            <a:ext cx="457200" cy="365760"/>
+            <a:ext cx="341760" cy="276999"/>
           </a:xfrm>
           <a:prstGeom prst="rect">
             <a:avLst/>
@@ -8298,23 +8878,42 @@
           </a:bodyPr>
           <a:lstStyle/>
           <a:p>
-            <a:pPr algn="r">
-              <a:defRPr sz="1300">
-                <a:solidFill>
-                  <a:srgbClr val="5F5F5F"/>
-                </a:solidFill>
-                <a:latin typeface="Noto Sans CJK KR"/>
-              </a:defRPr>
-            </a:pPr>
-            <a:r>
-              <a:t>07</a:t>
-            </a:r>
-          </a:p>
-        </p:txBody>
-      </p:sp>
-      <p:sp>
-        <p:nvSpPr>
-          <p:cNvPr id="4" name="Rectangle 3"/>
+            <a:r>
+              <a:rPr sz="1200" dirty="0">
+                <a:solidFill>
+                  <a:srgbClr val="A0A0A0"/>
+                </a:solidFill>
+                <a:latin typeface="Noto Sans CJK KR"/>
+              </a:rPr>
+              <a:t>0</a:t>
+            </a:r>
+            <a:r>
+              <a:rPr lang="en-US" sz="1200" dirty="0">
+                <a:solidFill>
+                  <a:srgbClr val="A0A0A0"/>
+                </a:solidFill>
+                <a:latin typeface="Noto Sans CJK KR"/>
+              </a:rPr>
+              <a:t>7</a:t>
+            </a:r>
+            <a:endParaRPr sz="1200" dirty="0">
+              <a:solidFill>
+                <a:srgbClr val="A0A0A0"/>
+              </a:solidFill>
+              <a:latin typeface="Noto Sans CJK KR"/>
+            </a:endParaRPr>
+          </a:p>
+        </p:txBody>
+      </p:sp>
+      <p:sp>
+        <p:nvSpPr>
+          <p:cNvPr id="19" name="Rectangle 3">
+            <a:extLst>
+              <a:ext uri="{FF2B5EF4-FFF2-40B4-BE49-F238E27FC236}">
+                <a16:creationId xmlns:a16="http://schemas.microsoft.com/office/drawing/2014/main" id="{CED08A07-6084-F753-8B28-1D62C8AA9D7C}"/>
+              </a:ext>
+            </a:extLst>
+          </p:cNvPr>
           <p:cNvSpPr/>
           <p:nvPr/>
         </p:nvSpPr>
@@ -8358,165 +8957,30 @@
       </p:sp>
       <p:sp>
         <p:nvSpPr>
-          <p:cNvPr id="5" name="TextBox 4"/>
-          <p:cNvSpPr txBox="1"/>
-          <p:nvPr/>
-        </p:nvSpPr>
-        <p:spPr>
-          <a:xfrm>
-            <a:off x="868680" y="1371600"/>
-            <a:ext cx="10332720" cy="384721"/>
-          </a:xfrm>
-          <a:prstGeom prst="rect">
-            <a:avLst/>
-          </a:prstGeom>
-          <a:noFill/>
-        </p:spPr>
-        <p:txBody>
-          <a:bodyPr wrap="square" anchor="t">
-            <a:spAutoFit/>
-          </a:bodyPr>
-          <a:lstStyle/>
-          <a:p>
-            <a:pPr>
-              <a:defRPr sz="1900" b="0">
-                <a:solidFill>
-                  <a:srgbClr val="F5F5F5"/>
-                </a:solidFill>
-                <a:latin typeface="Noto Sans CJK KR"/>
-              </a:defRPr>
-            </a:pPr>
-            <a:r>
-              <a:rPr lang="en-US" altLang="ko-KR" dirty="0">
-                <a:solidFill>
-                  <a:srgbClr val="FFFFFF"/>
-                </a:solidFill>
-                <a:latin typeface="Malgun Gothic"/>
-              </a:rPr>
-              <a:t>reverse</a:t>
-            </a:r>
-            <a:r>
-              <a:rPr lang="ko-KR" altLang="en-US" dirty="0">
-                <a:solidFill>
-                  <a:srgbClr val="FFFFFF"/>
-                </a:solidFill>
-                <a:latin typeface="Malgun Gothic"/>
-              </a:rPr>
-              <a:t> </a:t>
-            </a:r>
-            <a:r>
-              <a:rPr lang="en-US" altLang="ko-KR" dirty="0">
-                <a:solidFill>
-                  <a:srgbClr val="FFFFFF"/>
-                </a:solidFill>
-                <a:latin typeface="Malgun Gothic"/>
-              </a:rPr>
-              <a:t>process</a:t>
-            </a:r>
-            <a:r>
-              <a:rPr lang="ko-KR" altLang="en-US" dirty="0">
-                <a:solidFill>
-                  <a:srgbClr val="FFFFFF"/>
-                </a:solidFill>
-                <a:latin typeface="Malgun Gothic"/>
-              </a:rPr>
-              <a:t>는 평균과 분산이 </a:t>
-            </a:r>
-            <a:r>
-              <a:rPr lang="en-US" altLang="ko-KR" dirty="0">
-                <a:solidFill>
-                  <a:srgbClr val="FFFFFF"/>
-                </a:solidFill>
-                <a:latin typeface="Malgun Gothic"/>
-              </a:rPr>
-              <a:t>θ</a:t>
-            </a:r>
-            <a:r>
-              <a:rPr lang="ko-KR" altLang="en-US" dirty="0">
-                <a:solidFill>
-                  <a:srgbClr val="FFFFFF"/>
-                </a:solidFill>
-                <a:latin typeface="Malgun Gothic"/>
-              </a:rPr>
-              <a:t>로 </a:t>
-            </a:r>
-            <a:r>
-              <a:rPr lang="ko-KR" altLang="en-US" dirty="0" err="1">
-                <a:solidFill>
-                  <a:srgbClr val="FFFFFF"/>
-                </a:solidFill>
-                <a:latin typeface="Malgun Gothic"/>
-              </a:rPr>
-              <a:t>매개변수화된</a:t>
-            </a:r>
-            <a:r>
-              <a:rPr lang="ko-KR" altLang="en-US" dirty="0">
-                <a:solidFill>
-                  <a:srgbClr val="FFFFFF"/>
-                </a:solidFill>
-                <a:latin typeface="Malgun Gothic"/>
-              </a:rPr>
-              <a:t> </a:t>
-            </a:r>
-            <a:r>
-              <a:rPr lang="en-US" altLang="ko-KR" dirty="0">
-                <a:solidFill>
-                  <a:srgbClr val="FFFFFF"/>
-                </a:solidFill>
-                <a:latin typeface="Malgun Gothic"/>
-              </a:rPr>
-              <a:t>Gaussian transition</a:t>
-            </a:r>
-            <a:r>
-              <a:rPr lang="ko-KR" altLang="en-US" dirty="0">
-                <a:solidFill>
-                  <a:srgbClr val="FFFFFF"/>
-                </a:solidFill>
-                <a:latin typeface="Malgun Gothic"/>
-              </a:rPr>
-              <a:t>으로 </a:t>
-            </a:r>
-            <a:r>
-              <a:rPr lang="ko-KR" altLang="en-US" dirty="0" err="1">
-                <a:solidFill>
-                  <a:srgbClr val="FFFFFF"/>
-                </a:solidFill>
-                <a:latin typeface="Malgun Gothic"/>
-              </a:rPr>
-              <a:t>모델링된다</a:t>
-            </a:r>
-            <a:r>
-              <a:rPr lang="en-US" altLang="ko-KR" dirty="0">
-                <a:solidFill>
-                  <a:srgbClr val="FFFFFF"/>
-                </a:solidFill>
-                <a:latin typeface="Malgun Gothic"/>
-              </a:rPr>
-              <a:t>.</a:t>
-            </a:r>
-          </a:p>
-        </p:txBody>
-      </p:sp>
-      <p:sp>
-        <p:nvSpPr>
-          <p:cNvPr id="6" name="Rectangle 5"/>
+          <p:cNvPr id="23" name="Rectangle 5">
+            <a:extLst>
+              <a:ext uri="{FF2B5EF4-FFF2-40B4-BE49-F238E27FC236}">
+                <a16:creationId xmlns:a16="http://schemas.microsoft.com/office/drawing/2014/main" id="{0A08A6AD-487F-CDB3-5455-DA0CCBC370D2}"/>
+              </a:ext>
+            </a:extLst>
+          </p:cNvPr>
           <p:cNvSpPr/>
           <p:nvPr/>
         </p:nvSpPr>
         <p:spPr>
           <a:xfrm>
-            <a:off x="914400" y="2011680"/>
-            <a:ext cx="10241280" cy="713232"/>
+            <a:off x="914400" y="1874519"/>
+            <a:ext cx="9875520" cy="548640"/>
           </a:xfrm>
           <a:prstGeom prst="rect">
             <a:avLst/>
           </a:prstGeom>
           <a:solidFill>
-            <a:srgbClr val="F5F5F5"/>
+            <a:srgbClr val="EEEEEE"/>
           </a:solidFill>
           <a:ln>
             <a:solidFill>
-              <a:srgbClr val="F5F5F5"/>
+              <a:srgbClr val="EEEEEE"/>
             </a:solidFill>
           </a:ln>
         </p:spPr>
@@ -8535,167 +8999,48 @@
           </a:fontRef>
         </p:style>
         <p:txBody>
-          <a:bodyPr rtlCol="0" anchor="ctr"/>
+          <a:bodyPr wrap="square" lIns="109728" tIns="27432" rIns="109728" bIns="27432" rtlCol="0" anchor="ctr"/>
           <a:lstStyle/>
           <a:p>
             <a:pPr algn="ctr"/>
-            <a:endParaRPr/>
-          </a:p>
-        </p:txBody>
-      </p:sp>
-      <p:sp>
-        <p:nvSpPr>
-          <p:cNvPr id="7" name="TextBox 6"/>
-          <p:cNvSpPr txBox="1"/>
-          <p:nvPr/>
-        </p:nvSpPr>
-        <p:spPr>
-          <a:xfrm>
-            <a:off x="1024128" y="2066544"/>
-            <a:ext cx="10021824" cy="603504"/>
-          </a:xfrm>
-          <a:prstGeom prst="rect">
-            <a:avLst/>
-          </a:prstGeom>
-          <a:noFill/>
-        </p:spPr>
-        <p:txBody>
-          <a:bodyPr wrap="square" anchor="ctr">
-            <a:spAutoFit/>
-          </a:bodyPr>
-          <a:lstStyle/>
-          <a:p>
-            <a:pPr algn="ctr">
-              <a:defRPr sz="2300">
-                <a:solidFill>
-                  <a:srgbClr val="000000"/>
+            <a:r>
+              <a:rPr sz="2400">
+                <a:solidFill>
+                  <a:srgbClr val="0A0A0A"/>
                 </a:solidFill>
                 <a:latin typeface="Cambria Math"/>
-              </a:defRPr>
-            </a:pPr>
-            <a:r>
-              <a:rPr dirty="0" err="1"/>
-              <a:t>pθ</a:t>
-            </a:r>
-            <a:r>
-              <a:rPr dirty="0"/>
-              <a:t>(xₜ₋₁ | xₜ) = 𝒩(xₜ₋₁ ; </a:t>
-            </a:r>
-            <a:r>
-              <a:rPr dirty="0" err="1"/>
-              <a:t>μθ</a:t>
-            </a:r>
-            <a:r>
-              <a:rPr dirty="0"/>
-              <a:t>(</a:t>
-            </a:r>
-            <a:r>
-              <a:rPr dirty="0" err="1"/>
-              <a:t>xₜ,t</a:t>
-            </a:r>
-            <a:r>
-              <a:rPr dirty="0"/>
-              <a:t>), </a:t>
-            </a:r>
-            <a:r>
-              <a:rPr dirty="0" err="1"/>
-              <a:t>Σθ</a:t>
-            </a:r>
-            <a:r>
-              <a:rPr dirty="0"/>
-              <a:t>(</a:t>
-            </a:r>
-            <a:r>
-              <a:rPr dirty="0" err="1"/>
-              <a:t>xₜ,t</a:t>
-            </a:r>
-            <a:r>
-              <a:rPr dirty="0"/>
-              <a:t>))</a:t>
-            </a:r>
-          </a:p>
-        </p:txBody>
-      </p:sp>
-      <p:sp>
-        <p:nvSpPr>
-          <p:cNvPr id="8" name="TextBox 7"/>
-          <p:cNvSpPr txBox="1"/>
-          <p:nvPr/>
-        </p:nvSpPr>
-        <p:spPr>
-          <a:xfrm>
-            <a:off x="868680" y="3035808"/>
-            <a:ext cx="10058400" cy="365760"/>
-          </a:xfrm>
-          <a:prstGeom prst="rect">
-            <a:avLst/>
-          </a:prstGeom>
-          <a:noFill/>
-        </p:spPr>
-        <p:txBody>
-          <a:bodyPr wrap="square" anchor="t">
-            <a:spAutoFit/>
-          </a:bodyPr>
-          <a:lstStyle/>
-          <a:p>
-            <a:pPr>
-              <a:defRPr sz="1700" b="0">
-                <a:solidFill>
-                  <a:srgbClr val="B4B4B4"/>
-                </a:solidFill>
-                <a:latin typeface="Noto Sans CJK KR"/>
-              </a:defRPr>
-            </a:pPr>
-            <a:r>
-              <a:rPr lang="en-US" altLang="ko-KR" dirty="0">
-                <a:solidFill>
-                  <a:srgbClr val="FFFFFF"/>
-                </a:solidFill>
-                <a:latin typeface="Malgun Gothic"/>
-              </a:rPr>
-              <a:t>x₀</a:t>
-            </a:r>
-            <a:r>
-              <a:rPr lang="ko-KR" altLang="en-US" dirty="0">
-                <a:solidFill>
-                  <a:srgbClr val="FFFFFF"/>
-                </a:solidFill>
-                <a:latin typeface="Malgun Gothic"/>
-              </a:rPr>
-              <a:t>가 주어졌을 때의 순방향 </a:t>
-            </a:r>
-            <a:r>
-              <a:rPr lang="en-US" altLang="ko-KR" dirty="0">
-                <a:solidFill>
-                  <a:srgbClr val="FFFFFF"/>
-                </a:solidFill>
-                <a:latin typeface="Malgun Gothic"/>
-              </a:rPr>
-              <a:t>posterior:</a:t>
-            </a:r>
-          </a:p>
-        </p:txBody>
-      </p:sp>
-      <p:sp>
-        <p:nvSpPr>
-          <p:cNvPr id="9" name="Rectangle 8"/>
+              </a:rPr>
+              <a:t>E[−log pθ(x₀)] ≤ L</a:t>
+            </a:r>
+          </a:p>
+        </p:txBody>
+      </p:sp>
+      <p:sp>
+        <p:nvSpPr>
+          <p:cNvPr id="25" name="Rectangle 6">
+            <a:extLst>
+              <a:ext uri="{FF2B5EF4-FFF2-40B4-BE49-F238E27FC236}">
+                <a16:creationId xmlns:a16="http://schemas.microsoft.com/office/drawing/2014/main" id="{428BE222-9E46-3B34-45C9-1F1634AB9EEC}"/>
+              </a:ext>
+            </a:extLst>
+          </p:cNvPr>
           <p:cNvSpPr/>
           <p:nvPr/>
         </p:nvSpPr>
         <p:spPr>
           <a:xfrm>
-            <a:off x="914400" y="3547872"/>
-            <a:ext cx="10241280" cy="658368"/>
+            <a:off x="914400" y="2606040"/>
+            <a:ext cx="9875520" cy="548640"/>
           </a:xfrm>
           <a:prstGeom prst="rect">
             <a:avLst/>
           </a:prstGeom>
           <a:solidFill>
-            <a:srgbClr val="F5F5F5"/>
+            <a:srgbClr val="EEEEEE"/>
           </a:solidFill>
           <a:ln>
             <a:solidFill>
-              <a:srgbClr val="F5F5F5"/>
+              <a:srgbClr val="EEEEEE"/>
             </a:solidFill>
           </a:ln>
         </p:spPr>
@@ -8714,176 +9059,88 @@
           </a:fontRef>
         </p:style>
         <p:txBody>
-          <a:bodyPr rtlCol="0" anchor="ctr"/>
+          <a:bodyPr wrap="square" lIns="109728" tIns="27432" rIns="109728" bIns="27432" rtlCol="0" anchor="ctr"/>
           <a:lstStyle/>
           <a:p>
             <a:pPr algn="ctr"/>
-            <a:endParaRPr/>
-          </a:p>
-        </p:txBody>
-      </p:sp>
-      <p:sp>
-        <p:nvSpPr>
-          <p:cNvPr id="10" name="TextBox 9"/>
-          <p:cNvSpPr txBox="1"/>
-          <p:nvPr/>
-        </p:nvSpPr>
-        <p:spPr>
-          <a:xfrm>
-            <a:off x="1024128" y="3602736"/>
-            <a:ext cx="10021824" cy="548640"/>
-          </a:xfrm>
-          <a:prstGeom prst="rect">
-            <a:avLst/>
-          </a:prstGeom>
-          <a:noFill/>
-        </p:spPr>
-        <p:txBody>
-          <a:bodyPr wrap="square" anchor="ctr">
-            <a:spAutoFit/>
-          </a:bodyPr>
-          <a:lstStyle/>
-          <a:p>
-            <a:pPr algn="ctr">
-              <a:defRPr sz="2100">
-                <a:solidFill>
-                  <a:srgbClr val="000000"/>
+            <a:r>
+              <a:rPr sz="2300">
+                <a:solidFill>
+                  <a:srgbClr val="0A0A0A"/>
                 </a:solidFill>
                 <a:latin typeface="Cambria Math"/>
-              </a:defRPr>
-            </a:pPr>
-            <a:r>
-              <a:rPr dirty="0"/>
-              <a:t>q(xₜ₋₁ | xₜ, x₀) = 𝒩(xₜ₋₁ ; μ̃ₜ(</a:t>
-            </a:r>
-            <a:r>
-              <a:rPr dirty="0" err="1"/>
-              <a:t>xₜ,x</a:t>
-            </a:r>
-            <a:r>
-              <a:rPr dirty="0"/>
-              <a:t>₀), β̃ₜ I)</a:t>
-            </a:r>
-          </a:p>
-        </p:txBody>
-      </p:sp>
-      <p:sp>
-        <p:nvSpPr>
-          <p:cNvPr id="11" name="TextBox 10"/>
-          <p:cNvSpPr txBox="1"/>
-          <p:nvPr/>
-        </p:nvSpPr>
-        <p:spPr>
-          <a:xfrm>
-            <a:off x="868680" y="4590288"/>
-            <a:ext cx="10058400" cy="384721"/>
-          </a:xfrm>
-          <a:prstGeom prst="rect">
-            <a:avLst/>
-          </a:prstGeom>
-          <a:noFill/>
-        </p:spPr>
-        <p:txBody>
-          <a:bodyPr wrap="square" anchor="t">
-            <a:spAutoFit/>
-          </a:bodyPr>
-          <a:lstStyle/>
-          <a:p>
-            <a:pPr>
-              <a:defRPr sz="1900" b="0">
-                <a:solidFill>
-                  <a:srgbClr val="F5F5F5"/>
-                </a:solidFill>
-                <a:latin typeface="Noto Sans CJK KR"/>
-              </a:defRPr>
-            </a:pPr>
-            <a:r>
-              <a:rPr lang="ko-KR" altLang="en-US" dirty="0">
-                <a:solidFill>
-                  <a:srgbClr val="FFFFFF"/>
-                </a:solidFill>
-                <a:latin typeface="Malgun Gothic"/>
-              </a:rPr>
-              <a:t>학습은 실제 </a:t>
-            </a:r>
-            <a:r>
-              <a:rPr lang="en-US" altLang="ko-KR" dirty="0">
-                <a:solidFill>
-                  <a:srgbClr val="FFFFFF"/>
-                </a:solidFill>
-                <a:latin typeface="Malgun Gothic"/>
-              </a:rPr>
-              <a:t>posterior mean μ̃ₜ</a:t>
-            </a:r>
-            <a:r>
-              <a:rPr lang="ko-KR" altLang="en-US" dirty="0">
-                <a:solidFill>
-                  <a:srgbClr val="FFFFFF"/>
-                </a:solidFill>
-                <a:latin typeface="Malgun Gothic"/>
-              </a:rPr>
-              <a:t>와 모델 평균 </a:t>
-            </a:r>
-            <a:r>
-              <a:rPr lang="en-US" altLang="ko-KR" dirty="0" err="1">
-                <a:solidFill>
-                  <a:srgbClr val="FFFFFF"/>
-                </a:solidFill>
-                <a:latin typeface="Malgun Gothic"/>
-              </a:rPr>
-              <a:t>μθ</a:t>
-            </a:r>
-            <a:r>
-              <a:rPr lang="ko-KR" altLang="en-US" dirty="0">
-                <a:solidFill>
-                  <a:srgbClr val="FFFFFF"/>
-                </a:solidFill>
-                <a:latin typeface="Malgun Gothic"/>
-              </a:rPr>
-              <a:t> 사이의 차이를 줄이는 방향으로 진행된다</a:t>
-            </a:r>
-            <a:r>
-              <a:rPr lang="en-US" altLang="ko-KR" dirty="0">
-                <a:solidFill>
-                  <a:srgbClr val="FFFFFF"/>
-                </a:solidFill>
-                <a:latin typeface="Malgun Gothic"/>
-              </a:rPr>
-              <a:t>.</a:t>
-            </a:r>
-          </a:p>
-        </p:txBody>
-      </p:sp>
-      <p:pic>
-        <p:nvPicPr>
-          <p:cNvPr id="12" name="Picture 11" descr="s6_img2_gray.png"/>
-          <p:cNvPicPr>
-            <a:picLocks noChangeAspect="1"/>
-          </p:cNvPicPr>
-          <p:nvPr/>
-        </p:nvPicPr>
-        <p:blipFill>
-          <a:blip r:embed="rId2"/>
-          <a:stretch>
-            <a:fillRect/>
-          </a:stretch>
-        </p:blipFill>
-        <p:spPr>
-          <a:xfrm>
-            <a:off x="3334650" y="5138928"/>
-            <a:ext cx="5446498" cy="768096"/>
-          </a:xfrm>
-          <a:prstGeom prst="rect">
-            <a:avLst/>
-          </a:prstGeom>
-        </p:spPr>
-      </p:pic>
-      <p:sp>
-        <p:nvSpPr>
-          <p:cNvPr id="15" name="TextBox 14">
+              </a:rPr>
+              <a:t>L = E_q [ −log  pθ(x₀:T) / q(x₁:T | x₀) ]</a:t>
+            </a:r>
+          </a:p>
+        </p:txBody>
+      </p:sp>
+      <p:sp>
+        <p:nvSpPr>
+          <p:cNvPr id="29" name="Rectangle 8">
             <a:extLst>
               <a:ext uri="{FF2B5EF4-FFF2-40B4-BE49-F238E27FC236}">
-                <a16:creationId xmlns:a16="http://schemas.microsoft.com/office/drawing/2014/main" id="{FA79216B-6491-4C56-7C6A-DE29D990DA41}"/>
+                <a16:creationId xmlns:a16="http://schemas.microsoft.com/office/drawing/2014/main" id="{57C77199-F607-777E-0BE4-03F8ADB0837B}"/>
+              </a:ext>
+            </a:extLst>
+          </p:cNvPr>
+          <p:cNvSpPr/>
+          <p:nvPr/>
+        </p:nvSpPr>
+        <p:spPr>
+          <a:xfrm>
+            <a:off x="914400" y="3785615"/>
+            <a:ext cx="9875520" cy="548640"/>
+          </a:xfrm>
+          <a:prstGeom prst="rect">
+            <a:avLst/>
+          </a:prstGeom>
+          <a:solidFill>
+            <a:srgbClr val="EEEEEE"/>
+          </a:solidFill>
+          <a:ln>
+            <a:solidFill>
+              <a:srgbClr val="EEEEEE"/>
+            </a:solidFill>
+          </a:ln>
+        </p:spPr>
+        <p:style>
+          <a:lnRef idx="1">
+            <a:schemeClr val="accent1"/>
+          </a:lnRef>
+          <a:fillRef idx="3">
+            <a:schemeClr val="accent1"/>
+          </a:fillRef>
+          <a:effectRef idx="2">
+            <a:schemeClr val="accent1"/>
+          </a:effectRef>
+          <a:fontRef idx="minor">
+            <a:schemeClr val="lt1"/>
+          </a:fontRef>
+        </p:style>
+        <p:txBody>
+          <a:bodyPr wrap="square" lIns="109728" tIns="27432" rIns="109728" bIns="27432" rtlCol="0" anchor="ctr"/>
+          <a:lstStyle/>
+          <a:p>
+            <a:pPr algn="ctr"/>
+            <a:r>
+              <a:rPr sz="2400" dirty="0">
+                <a:solidFill>
+                  <a:srgbClr val="0A0A0A"/>
+                </a:solidFill>
+                <a:latin typeface="Cambria Math"/>
+              </a:rPr>
+              <a:t>L = L_T + Σ_{t&gt;1} L_{t−1} + L₀</a:t>
+            </a:r>
+          </a:p>
+        </p:txBody>
+      </p:sp>
+      <p:sp>
+        <p:nvSpPr>
+          <p:cNvPr id="35" name="TextBox 34">
+            <a:extLst>
+              <a:ext uri="{FF2B5EF4-FFF2-40B4-BE49-F238E27FC236}">
+                <a16:creationId xmlns:a16="http://schemas.microsoft.com/office/drawing/2014/main" id="{A77E524C-64AC-D9C7-58FA-9357EF96B54F}"/>
               </a:ext>
             </a:extLst>
           </p:cNvPr>
@@ -8892,8 +9149,8 @@
         </p:nvSpPr>
         <p:spPr>
           <a:xfrm>
-            <a:off x="731520" y="6510528"/>
-            <a:ext cx="6217920" cy="230832"/>
+            <a:off x="868680" y="1353312"/>
+            <a:ext cx="10378440" cy="369332"/>
           </a:xfrm>
           <a:prstGeom prst="rect">
             <a:avLst/>
@@ -8906,27 +9163,515 @@
           </a:bodyPr>
           <a:lstStyle/>
           <a:p>
+            <a:r>
+              <a:rPr lang="en-US" altLang="ko-KR" dirty="0">
+                <a:solidFill>
+                  <a:srgbClr val="F5F5F5"/>
+                </a:solidFill>
+                <a:latin typeface="Noto Sans CJK KR"/>
+              </a:rPr>
+              <a:t>DDPM</a:t>
+            </a:r>
+            <a:r>
+              <a:rPr lang="ko-KR" altLang="en-US" dirty="0">
+                <a:solidFill>
+                  <a:srgbClr val="F5F5F5"/>
+                </a:solidFill>
+                <a:latin typeface="Noto Sans CJK KR"/>
+              </a:rPr>
+              <a:t>은 </a:t>
+            </a:r>
+            <a:r>
+              <a:rPr lang="en-US" altLang="ko-KR" dirty="0">
+                <a:solidFill>
+                  <a:srgbClr val="F5F5F5"/>
+                </a:solidFill>
+                <a:latin typeface="Noto Sans CJK KR"/>
+              </a:rPr>
+              <a:t>negative log-likelihood</a:t>
+            </a:r>
+            <a:r>
+              <a:rPr lang="ko-KR" altLang="en-US" dirty="0">
+                <a:solidFill>
+                  <a:srgbClr val="F5F5F5"/>
+                </a:solidFill>
+                <a:latin typeface="Noto Sans CJK KR"/>
+              </a:rPr>
+              <a:t>의 </a:t>
+            </a:r>
+            <a:r>
+              <a:rPr lang="en-US" altLang="ko-KR" dirty="0">
+                <a:solidFill>
+                  <a:srgbClr val="F5F5F5"/>
+                </a:solidFill>
+                <a:latin typeface="Noto Sans CJK KR"/>
+              </a:rPr>
+              <a:t>variational bound</a:t>
+            </a:r>
+            <a:r>
+              <a:rPr lang="ko-KR" altLang="en-US" dirty="0">
+                <a:solidFill>
+                  <a:srgbClr val="F5F5F5"/>
+                </a:solidFill>
+                <a:latin typeface="Noto Sans CJK KR"/>
+              </a:rPr>
+              <a:t>를 최소화하도록 학습한다</a:t>
+            </a:r>
+            <a:r>
+              <a:rPr lang="en-US" altLang="ko-KR" dirty="0">
+                <a:solidFill>
+                  <a:srgbClr val="F5F5F5"/>
+                </a:solidFill>
+                <a:latin typeface="Noto Sans CJK KR"/>
+              </a:rPr>
+              <a:t>.</a:t>
+            </a:r>
+          </a:p>
+        </p:txBody>
+      </p:sp>
+      <p:sp>
+        <p:nvSpPr>
+          <p:cNvPr id="37" name="TextBox 36">
+            <a:extLst>
+              <a:ext uri="{FF2B5EF4-FFF2-40B4-BE49-F238E27FC236}">
+                <a16:creationId xmlns:a16="http://schemas.microsoft.com/office/drawing/2014/main" id="{5FC5E767-3CA3-AD83-A361-9F23A6821E00}"/>
+              </a:ext>
+            </a:extLst>
+          </p:cNvPr>
+          <p:cNvSpPr txBox="1"/>
+          <p:nvPr/>
+        </p:nvSpPr>
+        <p:spPr>
+          <a:xfrm>
+            <a:off x="906780" y="3326134"/>
+            <a:ext cx="10378440" cy="369332"/>
+          </a:xfrm>
+          <a:prstGeom prst="rect">
+            <a:avLst/>
+          </a:prstGeom>
+          <a:noFill/>
+        </p:spPr>
+        <p:txBody>
+          <a:bodyPr wrap="square" anchor="t">
+            <a:spAutoFit/>
+          </a:bodyPr>
+          <a:lstStyle/>
+          <a:p>
+            <a:r>
+              <a:rPr lang="ko-KR" altLang="en-US" dirty="0">
+                <a:solidFill>
+                  <a:schemeClr val="bg1"/>
+                </a:solidFill>
+                <a:latin typeface="Noto Sans CJK KR"/>
+              </a:rPr>
+              <a:t>이를 </a:t>
+            </a:r>
+            <a:r>
+              <a:rPr lang="en-US" altLang="ko-KR" dirty="0">
+                <a:solidFill>
+                  <a:schemeClr val="bg1"/>
+                </a:solidFill>
+                <a:latin typeface="Noto Sans CJK KR"/>
+              </a:rPr>
+              <a:t>timestep</a:t>
+            </a:r>
+            <a:r>
+              <a:rPr lang="ko-KR" altLang="en-US" dirty="0">
+                <a:solidFill>
+                  <a:schemeClr val="bg1"/>
+                </a:solidFill>
+                <a:latin typeface="Noto Sans CJK KR"/>
+              </a:rPr>
+              <a:t>별 항으로 분해하면 다음과 같다</a:t>
+            </a:r>
+            <a:r>
+              <a:rPr lang="en-US" altLang="ko-KR" dirty="0">
+                <a:solidFill>
+                  <a:schemeClr val="bg1"/>
+                </a:solidFill>
+                <a:latin typeface="Noto Sans CJK KR"/>
+              </a:rPr>
+              <a:t>.</a:t>
+            </a:r>
+          </a:p>
+        </p:txBody>
+      </p:sp>
+      <p:sp>
+        <p:nvSpPr>
+          <p:cNvPr id="39" name="TextBox 38">
+            <a:extLst>
+              <a:ext uri="{FF2B5EF4-FFF2-40B4-BE49-F238E27FC236}">
+                <a16:creationId xmlns:a16="http://schemas.microsoft.com/office/drawing/2014/main" id="{22C7A9A4-6A3F-96BC-33A3-FD5F280D2B6B}"/>
+              </a:ext>
+            </a:extLst>
+          </p:cNvPr>
+          <p:cNvSpPr txBox="1"/>
+          <p:nvPr/>
+        </p:nvSpPr>
+        <p:spPr>
+          <a:xfrm>
+            <a:off x="906780" y="4583203"/>
+            <a:ext cx="10149840" cy="923330"/>
+          </a:xfrm>
+          <a:prstGeom prst="rect">
+            <a:avLst/>
+          </a:prstGeom>
+          <a:noFill/>
+        </p:spPr>
+        <p:txBody>
+          <a:bodyPr wrap="square">
+            <a:spAutoFit/>
+          </a:bodyPr>
+          <a:lstStyle/>
+          <a:p>
             <a:pPr>
-              <a:defRPr sz="900" b="0">
-                <a:solidFill>
-                  <a:srgbClr val="5F5F5F"/>
-                </a:solidFill>
-                <a:latin typeface="Noto Sans CJK KR"/>
-              </a:defRPr>
+              <a:spcAft>
+                <a:spcPts val="300"/>
+              </a:spcAft>
             </a:pPr>
             <a:r>
-              <a:rPr lang="en-US" dirty="0"/>
-              <a:t>AID2026_2_Study / </a:t>
-            </a:r>
-            <a:r>
-              <a:rPr lang="en-US" dirty="0" err="1"/>
-              <a:t>AIResearchers</a:t>
-            </a:r>
-            <a:endParaRPr dirty="0"/>
+              <a:rPr lang="en-US" altLang="ko-KR" dirty="0">
+                <a:solidFill>
+                  <a:srgbClr val="F5F5F5"/>
+                </a:solidFill>
+                <a:latin typeface="Noto Sans CJK KR"/>
+              </a:rPr>
+              <a:t>• L_T : q(</a:t>
+            </a:r>
+            <a:r>
+              <a:rPr lang="en-US" altLang="ko-KR" dirty="0" err="1">
+                <a:solidFill>
+                  <a:srgbClr val="F5F5F5"/>
+                </a:solidFill>
+                <a:latin typeface="Noto Sans CJK KR"/>
+              </a:rPr>
+              <a:t>x_T</a:t>
+            </a:r>
+            <a:r>
+              <a:rPr lang="en-US" altLang="ko-KR" dirty="0">
+                <a:solidFill>
+                  <a:srgbClr val="F5F5F5"/>
+                </a:solidFill>
+                <a:latin typeface="Noto Sans CJK KR"/>
+              </a:rPr>
+              <a:t> | x₀)</a:t>
+            </a:r>
+            <a:r>
+              <a:rPr lang="ko-KR" altLang="en-US" dirty="0">
+                <a:solidFill>
+                  <a:srgbClr val="F5F5F5"/>
+                </a:solidFill>
+                <a:latin typeface="Noto Sans CJK KR"/>
+              </a:rPr>
+              <a:t>와 </a:t>
+            </a:r>
+            <a:r>
+              <a:rPr lang="en-US" altLang="ko-KR" dirty="0">
+                <a:solidFill>
+                  <a:srgbClr val="F5F5F5"/>
+                </a:solidFill>
+                <a:latin typeface="Noto Sans CJK KR"/>
+              </a:rPr>
+              <a:t>prior p(</a:t>
+            </a:r>
+            <a:r>
+              <a:rPr lang="en-US" altLang="ko-KR" dirty="0" err="1">
+                <a:solidFill>
+                  <a:srgbClr val="F5F5F5"/>
+                </a:solidFill>
+                <a:latin typeface="Noto Sans CJK KR"/>
+              </a:rPr>
+              <a:t>x_T</a:t>
+            </a:r>
+            <a:r>
+              <a:rPr lang="en-US" altLang="ko-KR" dirty="0">
+                <a:solidFill>
+                  <a:srgbClr val="F5F5F5"/>
+                </a:solidFill>
+                <a:latin typeface="Noto Sans CJK KR"/>
+              </a:rPr>
+              <a:t>) </a:t>
+            </a:r>
+            <a:r>
+              <a:rPr lang="ko-KR" altLang="en-US" dirty="0">
+                <a:solidFill>
+                  <a:srgbClr val="F5F5F5"/>
+                </a:solidFill>
+                <a:latin typeface="Noto Sans CJK KR"/>
+              </a:rPr>
+              <a:t>사이의 </a:t>
+            </a:r>
+            <a:r>
+              <a:rPr lang="en-US" altLang="ko-KR" dirty="0">
+                <a:solidFill>
+                  <a:srgbClr val="F5F5F5"/>
+                </a:solidFill>
+                <a:latin typeface="Noto Sans CJK KR"/>
+              </a:rPr>
+              <a:t>KL divergence</a:t>
+            </a:r>
+            <a:br>
+              <a:rPr lang="en-US" altLang="ko-KR" dirty="0"/>
+            </a:br>
+            <a:r>
+              <a:rPr lang="en-US" altLang="ko-KR" dirty="0">
+                <a:solidFill>
+                  <a:srgbClr val="F5F5F5"/>
+                </a:solidFill>
+                <a:latin typeface="Noto Sans CJK KR"/>
+              </a:rPr>
+              <a:t>• L_{t−1} : q(x_{t−1}|</a:t>
+            </a:r>
+            <a:r>
+              <a:rPr lang="en-US" altLang="ko-KR" dirty="0" err="1">
+                <a:solidFill>
+                  <a:srgbClr val="F5F5F5"/>
+                </a:solidFill>
+                <a:latin typeface="Noto Sans CJK KR"/>
+              </a:rPr>
+              <a:t>x_t,x</a:t>
+            </a:r>
+            <a:r>
+              <a:rPr lang="en-US" altLang="ko-KR" dirty="0">
+                <a:solidFill>
+                  <a:srgbClr val="F5F5F5"/>
+                </a:solidFill>
+                <a:latin typeface="Noto Sans CJK KR"/>
+              </a:rPr>
+              <a:t>₀)</a:t>
+            </a:r>
+            <a:r>
+              <a:rPr lang="ko-KR" altLang="en-US" dirty="0">
+                <a:solidFill>
+                  <a:srgbClr val="F5F5F5"/>
+                </a:solidFill>
+                <a:latin typeface="Noto Sans CJK KR"/>
+              </a:rPr>
+              <a:t>와 </a:t>
+            </a:r>
+            <a:r>
+              <a:rPr lang="en-US" altLang="ko-KR" dirty="0">
+                <a:solidFill>
+                  <a:srgbClr val="F5F5F5"/>
+                </a:solidFill>
+                <a:latin typeface="Noto Sans CJK KR"/>
+              </a:rPr>
+              <a:t>p</a:t>
+            </a:r>
+            <a:r>
+              <a:rPr lang="el-GR" altLang="ko-KR" dirty="0">
+                <a:solidFill>
+                  <a:srgbClr val="F5F5F5"/>
+                </a:solidFill>
+                <a:latin typeface="Noto Sans CJK KR"/>
+              </a:rPr>
+              <a:t>θ(</a:t>
+            </a:r>
+            <a:r>
+              <a:rPr lang="en-US" altLang="ko-KR" dirty="0">
+                <a:solidFill>
+                  <a:srgbClr val="F5F5F5"/>
+                </a:solidFill>
+                <a:latin typeface="Noto Sans CJK KR"/>
+              </a:rPr>
+              <a:t>x_{t−1}|</a:t>
+            </a:r>
+            <a:r>
+              <a:rPr lang="en-US" altLang="ko-KR" dirty="0" err="1">
+                <a:solidFill>
+                  <a:srgbClr val="F5F5F5"/>
+                </a:solidFill>
+                <a:latin typeface="Noto Sans CJK KR"/>
+              </a:rPr>
+              <a:t>x_t</a:t>
+            </a:r>
+            <a:r>
+              <a:rPr lang="en-US" altLang="ko-KR" dirty="0">
+                <a:solidFill>
+                  <a:srgbClr val="F5F5F5"/>
+                </a:solidFill>
+                <a:latin typeface="Noto Sans CJK KR"/>
+              </a:rPr>
+              <a:t>) </a:t>
+            </a:r>
+            <a:r>
+              <a:rPr lang="ko-KR" altLang="en-US" dirty="0">
+                <a:solidFill>
+                  <a:srgbClr val="F5F5F5"/>
+                </a:solidFill>
+                <a:latin typeface="Noto Sans CJK KR"/>
+              </a:rPr>
+              <a:t>사이의 </a:t>
+            </a:r>
+            <a:r>
+              <a:rPr lang="en-US" altLang="ko-KR" dirty="0">
+                <a:solidFill>
+                  <a:srgbClr val="F5F5F5"/>
+                </a:solidFill>
+                <a:latin typeface="Noto Sans CJK KR"/>
+              </a:rPr>
+              <a:t>KL divergence</a:t>
+            </a:r>
+            <a:br>
+              <a:rPr lang="en-US" altLang="ko-KR" dirty="0"/>
+            </a:br>
+            <a:r>
+              <a:rPr lang="en-US" altLang="ko-KR" dirty="0">
+                <a:solidFill>
+                  <a:srgbClr val="F5F5F5"/>
+                </a:solidFill>
+                <a:latin typeface="Noto Sans CJK KR"/>
+              </a:rPr>
+              <a:t>• L₀ : x₀</a:t>
+            </a:r>
+            <a:r>
+              <a:rPr lang="ko-KR" altLang="en-US" dirty="0">
+                <a:solidFill>
+                  <a:srgbClr val="F5F5F5"/>
+                </a:solidFill>
+                <a:latin typeface="Noto Sans CJK KR"/>
+              </a:rPr>
+              <a:t>의 </a:t>
+            </a:r>
+            <a:r>
+              <a:rPr lang="en-US" altLang="ko-KR" dirty="0">
+                <a:solidFill>
+                  <a:srgbClr val="F5F5F5"/>
+                </a:solidFill>
+                <a:latin typeface="Noto Sans CJK KR"/>
+              </a:rPr>
+              <a:t>negative log-likelihood</a:t>
+            </a:r>
+          </a:p>
+        </p:txBody>
+      </p:sp>
+      <p:sp>
+        <p:nvSpPr>
+          <p:cNvPr id="41" name="TextBox 40">
+            <a:extLst>
+              <a:ext uri="{FF2B5EF4-FFF2-40B4-BE49-F238E27FC236}">
+                <a16:creationId xmlns:a16="http://schemas.microsoft.com/office/drawing/2014/main" id="{81CB07FD-221E-8C69-7585-F90A75B86806}"/>
+              </a:ext>
+            </a:extLst>
+          </p:cNvPr>
+          <p:cNvSpPr txBox="1"/>
+          <p:nvPr/>
+        </p:nvSpPr>
+        <p:spPr>
+          <a:xfrm>
+            <a:off x="914400" y="5572524"/>
+            <a:ext cx="10378440" cy="369332"/>
+          </a:xfrm>
+          <a:prstGeom prst="rect">
+            <a:avLst/>
+          </a:prstGeom>
+          <a:noFill/>
+        </p:spPr>
+        <p:txBody>
+          <a:bodyPr wrap="square" anchor="t">
+            <a:spAutoFit/>
+          </a:bodyPr>
+          <a:lstStyle/>
+          <a:p>
+            <a:r>
+              <a:rPr lang="ko-KR" altLang="en-US" dirty="0">
+                <a:solidFill>
+                  <a:srgbClr val="F5F5F5"/>
+                </a:solidFill>
+                <a:latin typeface="Noto Sans CJK KR"/>
+              </a:rPr>
+              <a:t>따라서 </a:t>
+            </a:r>
+            <a:r>
+              <a:rPr lang="en-US" altLang="ko-KR" dirty="0">
+                <a:solidFill>
+                  <a:srgbClr val="F5F5F5"/>
+                </a:solidFill>
+                <a:latin typeface="Noto Sans CJK KR"/>
+              </a:rPr>
+              <a:t>reverse process </a:t>
+            </a:r>
+            <a:r>
+              <a:rPr lang="ko-KR" altLang="en-US" dirty="0">
+                <a:solidFill>
+                  <a:srgbClr val="F5F5F5"/>
+                </a:solidFill>
+                <a:latin typeface="Noto Sans CJK KR"/>
+              </a:rPr>
+              <a:t>학습은 각 </a:t>
+            </a:r>
+            <a:r>
+              <a:rPr lang="en-US" altLang="ko-KR" dirty="0">
+                <a:solidFill>
+                  <a:srgbClr val="F5F5F5"/>
+                </a:solidFill>
+                <a:latin typeface="Noto Sans CJK KR"/>
+              </a:rPr>
+              <a:t>timestep</a:t>
+            </a:r>
+            <a:r>
+              <a:rPr lang="ko-KR" altLang="en-US" dirty="0">
+                <a:solidFill>
+                  <a:srgbClr val="F5F5F5"/>
+                </a:solidFill>
+                <a:latin typeface="Noto Sans CJK KR"/>
+              </a:rPr>
+              <a:t>에서 </a:t>
+            </a:r>
+            <a:r>
+              <a:rPr lang="en-US" altLang="ko-KR" dirty="0">
+                <a:solidFill>
+                  <a:srgbClr val="F5F5F5"/>
+                </a:solidFill>
+                <a:latin typeface="Noto Sans CJK KR"/>
+              </a:rPr>
+              <a:t>posterior</a:t>
+            </a:r>
+            <a:r>
+              <a:rPr lang="ko-KR" altLang="en-US" dirty="0">
+                <a:solidFill>
+                  <a:srgbClr val="F5F5F5"/>
+                </a:solidFill>
+                <a:latin typeface="Noto Sans CJK KR"/>
+              </a:rPr>
+              <a:t>와 </a:t>
+            </a:r>
+            <a:r>
+              <a:rPr lang="en-US" altLang="ko-KR" dirty="0">
+                <a:solidFill>
+                  <a:srgbClr val="F5F5F5"/>
+                </a:solidFill>
+                <a:latin typeface="Noto Sans CJK KR"/>
+              </a:rPr>
+              <a:t>model transition</a:t>
+            </a:r>
+            <a:r>
+              <a:rPr lang="ko-KR" altLang="en-US" dirty="0">
+                <a:solidFill>
+                  <a:srgbClr val="F5F5F5"/>
+                </a:solidFill>
+                <a:latin typeface="Noto Sans CJK KR"/>
+              </a:rPr>
+              <a:t>을 맞추는 문제로 정리된다</a:t>
+            </a:r>
+            <a:r>
+              <a:rPr lang="en-US" altLang="ko-KR" dirty="0">
+                <a:solidFill>
+                  <a:srgbClr val="F5F5F5"/>
+                </a:solidFill>
+                <a:latin typeface="Noto Sans CJK KR"/>
+              </a:rPr>
+              <a:t>.</a:t>
+            </a:r>
           </a:p>
         </p:txBody>
       </p:sp>
     </p:spTree>
+    <p:extLst>
+      <p:ext uri="{BB962C8B-B14F-4D97-AF65-F5344CB8AC3E}">
+        <p14:creationId xmlns:p14="http://schemas.microsoft.com/office/powerpoint/2010/main" val="3246089853"/>
+      </p:ext>
+    </p:extLst>
   </p:cSld>
   <p:clrMapOvr>
     <a:masterClrMapping/>
@@ -8990,7 +9735,7 @@
               </a:defRPr>
             </a:pPr>
             <a:r>
-              <a:t>ε-Prediction</a:t>
+              <a:t>Reverse Process</a:t>
             </a:r>
           </a:p>
         </p:txBody>
@@ -9026,7 +9771,7 @@
               </a:defRPr>
             </a:pPr>
             <a:r>
-              <a:t>08</a:t>
+              <a:t>07</a:t>
             </a:r>
           </a:p>
         </p:txBody>
@@ -9083,8 +9828,8 @@
         </p:nvSpPr>
         <p:spPr>
           <a:xfrm>
-            <a:off x="868680" y="1353312"/>
-            <a:ext cx="10424160" cy="384721"/>
+            <a:off x="868680" y="1371600"/>
+            <a:ext cx="10332720" cy="384721"/>
           </a:xfrm>
           <a:prstGeom prst="rect">
             <a:avLst/>
@@ -9112,7 +9857,7 @@
                 </a:solidFill>
                 <a:latin typeface="Malgun Gothic"/>
               </a:rPr>
-              <a:t>DDPM</a:t>
+              <a:t>reverse</a:t>
             </a:r>
             <a:r>
               <a:rPr lang="ko-KR" altLang="en-US" dirty="0">
@@ -9121,7 +9866,7 @@
                 </a:solidFill>
                 <a:latin typeface="Malgun Gothic"/>
               </a:rPr>
-              <a:t>은 </a:t>
+              <a:t> </a:t>
             </a:r>
             <a:r>
               <a:rPr lang="en-US" altLang="ko-KR" dirty="0">
@@ -9130,7 +9875,7 @@
                 </a:solidFill>
                 <a:latin typeface="Malgun Gothic"/>
               </a:rPr>
-              <a:t>noise ε</a:t>
+              <a:t>process</a:t>
             </a:r>
             <a:r>
               <a:rPr lang="ko-KR" altLang="en-US" dirty="0">
@@ -9139,7 +9884,7 @@
                 </a:solidFill>
                 <a:latin typeface="Malgun Gothic"/>
               </a:rPr>
-              <a:t>를 예측하는 </a:t>
+              <a:t>는 평균과 분산이 </a:t>
             </a:r>
             <a:r>
               <a:rPr lang="en-US" altLang="ko-KR" dirty="0">
@@ -9148,16 +9893,34 @@
                 </a:solidFill>
                 <a:latin typeface="Malgun Gothic"/>
               </a:rPr>
-              <a:t>network </a:t>
-            </a:r>
-            <a:r>
-              <a:rPr lang="en-US" altLang="ko-KR" dirty="0" err="1">
-                <a:solidFill>
-                  <a:srgbClr val="FFFFFF"/>
-                </a:solidFill>
-                <a:latin typeface="Malgun Gothic"/>
-              </a:rPr>
-              <a:t>εθ</a:t>
+              <a:t>θ</a:t>
+            </a:r>
+            <a:r>
+              <a:rPr lang="ko-KR" altLang="en-US" dirty="0">
+                <a:solidFill>
+                  <a:srgbClr val="FFFFFF"/>
+                </a:solidFill>
+                <a:latin typeface="Malgun Gothic"/>
+              </a:rPr>
+              <a:t>로 </a:t>
+            </a:r>
+            <a:r>
+              <a:rPr lang="ko-KR" altLang="en-US" dirty="0" err="1">
+                <a:solidFill>
+                  <a:srgbClr val="FFFFFF"/>
+                </a:solidFill>
+                <a:latin typeface="Malgun Gothic"/>
+              </a:rPr>
+              <a:t>매개변수화된</a:t>
+            </a:r>
+            <a:r>
+              <a:rPr lang="ko-KR" altLang="en-US" dirty="0">
+                <a:solidFill>
+                  <a:srgbClr val="FFFFFF"/>
+                </a:solidFill>
+                <a:latin typeface="Malgun Gothic"/>
+              </a:rPr>
+              <a:t> </a:t>
             </a:r>
             <a:r>
               <a:rPr lang="en-US" altLang="ko-KR" dirty="0">
@@ -9166,25 +9929,7 @@
                 </a:solidFill>
                 <a:latin typeface="Malgun Gothic"/>
               </a:rPr>
-              <a:t>(</a:t>
-            </a:r>
-            <a:r>
-              <a:rPr lang="en-US" altLang="ko-KR" dirty="0" err="1">
-                <a:solidFill>
-                  <a:srgbClr val="FFFFFF"/>
-                </a:solidFill>
-                <a:latin typeface="Malgun Gothic"/>
-              </a:rPr>
-              <a:t>xₜ,t</a:t>
-            </a:r>
-            <a:r>
-              <a:rPr lang="en-US" altLang="ko-KR" dirty="0">
-                <a:solidFill>
-                  <a:srgbClr val="FFFFFF"/>
-                </a:solidFill>
-                <a:latin typeface="Malgun Gothic"/>
-              </a:rPr>
-              <a:t>)</a:t>
+              <a:t>Gaussian transition</a:t>
             </a:r>
             <a:r>
               <a:rPr lang="ko-KR" altLang="en-US" dirty="0">
@@ -9193,7 +9938,7 @@
                 </a:solidFill>
                 <a:latin typeface="Malgun Gothic"/>
               </a:rPr>
-              <a:t>를 이용해 역방향 과정의 평균을 </a:t>
+              <a:t>으로 </a:t>
             </a:r>
             <a:r>
               <a:rPr lang="ko-KR" altLang="en-US" dirty="0" err="1">
@@ -9202,7 +9947,7 @@
                 </a:solidFill>
                 <a:latin typeface="Malgun Gothic"/>
               </a:rPr>
-              <a:t>매개변수화한다</a:t>
+              <a:t>모델링된다</a:t>
             </a:r>
             <a:r>
               <a:rPr lang="en-US" altLang="ko-KR" dirty="0">
@@ -9224,8 +9969,8 @@
         </p:nvSpPr>
         <p:spPr>
           <a:xfrm>
-            <a:off x="914400" y="1965960"/>
-            <a:ext cx="10287000" cy="749808"/>
+            <a:off x="914400" y="2011680"/>
+            <a:ext cx="10241280" cy="713232"/>
           </a:xfrm>
           <a:prstGeom prst="rect">
             <a:avLst/>
@@ -9270,8 +10015,8 @@
         </p:nvSpPr>
         <p:spPr>
           <a:xfrm>
-            <a:off x="1024128" y="2020824"/>
-            <a:ext cx="10067544" cy="640080"/>
+            <a:off x="1024128" y="2066544"/>
+            <a:ext cx="10021824" cy="603504"/>
           </a:xfrm>
           <a:prstGeom prst="rect">
             <a:avLst/>
@@ -9285,13 +10030,21 @@
           <a:lstStyle/>
           <a:p>
             <a:pPr algn="ctr">
-              <a:defRPr sz="2200">
+              <a:defRPr sz="2300">
                 <a:solidFill>
                   <a:srgbClr val="000000"/>
                 </a:solidFill>
                 <a:latin typeface="Cambria Math"/>
               </a:defRPr>
             </a:pPr>
+            <a:r>
+              <a:rPr dirty="0" err="1"/>
+              <a:t>pθ</a:t>
+            </a:r>
+            <a:r>
+              <a:rPr dirty="0"/>
+              <a:t>(xₜ₋₁ | xₜ) = 𝒩(xₜ₋₁ ; </a:t>
+            </a:r>
             <a:r>
               <a:rPr dirty="0" err="1"/>
               <a:t>μθ</a:t>
@@ -9306,11 +10059,11 @@
             </a:r>
             <a:r>
               <a:rPr dirty="0"/>
-              <a:t>) = 1/√αₜ · ( xₜ − βₜ/√(1−ᾱₜ) · </a:t>
+              <a:t>), </a:t>
             </a:r>
             <a:r>
               <a:rPr dirty="0" err="1"/>
-              <a:t>εθ</a:t>
+              <a:t>Σθ</a:t>
             </a:r>
             <a:r>
               <a:rPr dirty="0"/>
@@ -9322,7 +10075,7 @@
             </a:r>
             <a:r>
               <a:rPr dirty="0"/>
-              <a:t>) )</a:t>
+              <a:t>))</a:t>
             </a:r>
           </a:p>
         </p:txBody>
@@ -9335,8 +10088,8 @@
         </p:nvSpPr>
         <p:spPr>
           <a:xfrm>
-            <a:off x="868680" y="3044952"/>
-            <a:ext cx="10241280" cy="353943"/>
+            <a:off x="868680" y="3035808"/>
+            <a:ext cx="10058400" cy="365760"/>
           </a:xfrm>
           <a:prstGeom prst="rect">
             <a:avLst/>
@@ -9358,13 +10111,22 @@
               </a:defRPr>
             </a:pPr>
             <a:r>
+              <a:rPr lang="en-US" altLang="ko-KR" dirty="0">
+                <a:solidFill>
+                  <a:srgbClr val="FFFFFF"/>
+                </a:solidFill>
+                <a:latin typeface="Malgun Gothic"/>
+              </a:rPr>
+              <a:t>x₀</a:t>
+            </a:r>
+            <a:r>
               <a:rPr lang="ko-KR" altLang="en-US" dirty="0">
                 <a:solidFill>
                   <a:srgbClr val="FFFFFF"/>
                 </a:solidFill>
                 <a:latin typeface="Malgun Gothic"/>
               </a:rPr>
-              <a:t>이 매개변수화를 사용하면 </a:t>
+              <a:t>가 주어졌을 때의 순방향 </a:t>
             </a:r>
             <a:r>
               <a:rPr lang="en-US" altLang="ko-KR" dirty="0">
@@ -9373,43 +10135,7 @@
                 </a:solidFill>
                 <a:latin typeface="Malgun Gothic"/>
               </a:rPr>
-              <a:t>loss</a:t>
-            </a:r>
-            <a:r>
-              <a:rPr lang="ko-KR" altLang="en-US" dirty="0">
-                <a:solidFill>
-                  <a:srgbClr val="FFFFFF"/>
-                </a:solidFill>
-                <a:latin typeface="Malgun Gothic"/>
-              </a:rPr>
-              <a:t> </a:t>
-            </a:r>
-            <a:r>
-              <a:rPr lang="en-US" altLang="ko-KR" dirty="0">
-                <a:solidFill>
-                  <a:srgbClr val="FFFFFF"/>
-                </a:solidFill>
-                <a:latin typeface="Malgun Gothic"/>
-              </a:rPr>
-              <a:t>function</a:t>
-            </a:r>
-            <a:r>
-              <a:rPr lang="ko-KR" altLang="en-US" dirty="0">
-                <a:solidFill>
-                  <a:srgbClr val="FFFFFF"/>
-                </a:solidFill>
-                <a:latin typeface="Malgun Gothic"/>
-              </a:rPr>
-              <a:t>은 다음과 같이 단순화 할 수 있다</a:t>
-            </a:r>
-            <a:r>
-              <a:rPr lang="en-US" altLang="ko-KR" dirty="0">
-                <a:solidFill>
-                  <a:srgbClr val="FFFFFF"/>
-                </a:solidFill>
-                <a:latin typeface="Malgun Gothic"/>
-              </a:rPr>
-              <a:t>!</a:t>
+              <a:t>posterior:</a:t>
             </a:r>
           </a:p>
         </p:txBody>
@@ -9422,8 +10148,8 @@
         </p:nvSpPr>
         <p:spPr>
           <a:xfrm>
-            <a:off x="914400" y="3584448"/>
-            <a:ext cx="10287000" cy="896112"/>
+            <a:off x="914400" y="3547872"/>
+            <a:ext cx="10241280" cy="658368"/>
           </a:xfrm>
           <a:prstGeom prst="rect">
             <a:avLst/>
@@ -9468,8 +10194,8 @@
         </p:nvSpPr>
         <p:spPr>
           <a:xfrm>
-            <a:off x="1024128" y="3639312"/>
-            <a:ext cx="10067544" cy="786384"/>
+            <a:off x="1024128" y="3602736"/>
+            <a:ext cx="10021824" cy="548640"/>
           </a:xfrm>
           <a:prstGeom prst="rect">
             <a:avLst/>
@@ -9483,7 +10209,7 @@
           <a:lstStyle/>
           <a:p>
             <a:pPr algn="ctr">
-              <a:defRPr sz="2000">
+              <a:defRPr sz="2100">
                 <a:solidFill>
                   <a:srgbClr val="000000"/>
                 </a:solidFill>
@@ -9491,7 +10217,16 @@
               </a:defRPr>
             </a:pPr>
             <a:r>
-              <a:t>Lsimple(θ) = Eₜ,ₓ₀,ε [ ‖ ε − εθ( √ᾱₜ x₀ + √(1−ᾱₜ) ε , t ) ‖² ]</a:t>
+              <a:rPr dirty="0"/>
+              <a:t>q(xₜ₋₁ | xₜ, x₀) = 𝒩(xₜ₋₁ ; μ̃ₜ(</a:t>
+            </a:r>
+            <a:r>
+              <a:rPr dirty="0" err="1"/>
+              <a:t>xₜ,x</a:t>
+            </a:r>
+            <a:r>
+              <a:rPr dirty="0"/>
+              <a:t>₀), β̃ₜ I)</a:t>
             </a:r>
           </a:p>
         </p:txBody>
@@ -9504,8 +10239,8 @@
         </p:nvSpPr>
         <p:spPr>
           <a:xfrm>
-            <a:off x="932688" y="4736592"/>
-            <a:ext cx="10149840" cy="907941"/>
+            <a:off x="868680" y="4590288"/>
+            <a:ext cx="10058400" cy="384721"/>
           </a:xfrm>
           <a:prstGeom prst="rect">
             <a:avLst/>
@@ -9513,16 +10248,13 @@
           <a:noFill/>
         </p:spPr>
         <p:txBody>
-          <a:bodyPr wrap="square">
+          <a:bodyPr wrap="square" anchor="t">
             <a:spAutoFit/>
           </a:bodyPr>
           <a:lstStyle/>
           <a:p>
             <a:pPr>
-              <a:spcAft>
-                <a:spcPts val="0"/>
-              </a:spcAft>
-              <a:defRPr sz="1700">
+              <a:defRPr sz="1900" b="0">
                 <a:solidFill>
                   <a:srgbClr val="F5F5F5"/>
                 </a:solidFill>
@@ -9530,13 +10262,22 @@
               </a:defRPr>
             </a:pPr>
             <a:r>
+              <a:rPr lang="ko-KR" altLang="en-US" dirty="0">
+                <a:solidFill>
+                  <a:srgbClr val="FFFFFF"/>
+                </a:solidFill>
+                <a:latin typeface="Malgun Gothic"/>
+              </a:rPr>
+              <a:t>학습은 실제 </a:t>
+            </a:r>
+            <a:r>
               <a:rPr lang="en-US" altLang="ko-KR" dirty="0">
                 <a:solidFill>
                   <a:srgbClr val="FFFFFF"/>
                 </a:solidFill>
                 <a:latin typeface="Malgun Gothic"/>
               </a:rPr>
-              <a:t>• </a:t>
+              <a:t>posterior mean μ̃ₜ</a:t>
             </a:r>
             <a:r>
               <a:rPr lang="ko-KR" altLang="en-US" dirty="0">
@@ -9545,7 +10286,25 @@
                 </a:solidFill>
                 <a:latin typeface="Malgun Gothic"/>
               </a:rPr>
-              <a:t>데이터 분포에서 </a:t>
+              <a:t>와 모델 평균 </a:t>
+            </a:r>
+            <a:r>
+              <a:rPr lang="en-US" altLang="ko-KR" dirty="0" err="1">
+                <a:solidFill>
+                  <a:srgbClr val="FFFFFF"/>
+                </a:solidFill>
+                <a:latin typeface="Malgun Gothic"/>
+              </a:rPr>
+              <a:t>μθ</a:t>
+            </a:r>
+            <a:r>
+              <a:rPr lang="ko-KR" altLang="en-US" dirty="0">
+                <a:solidFill>
+                  <a:srgbClr val="FFFFFF"/>
+                </a:solidFill>
+                <a:latin typeface="Malgun Gothic"/>
+              </a:rPr>
+              <a:t> 사이의 차이를 줄이는 방향으로 진행된다</a:t>
             </a:r>
             <a:r>
               <a:rPr lang="en-US" altLang="ko-KR" dirty="0">
@@ -9554,210 +10313,41 @@
                 </a:solidFill>
                 <a:latin typeface="Malgun Gothic"/>
               </a:rPr>
-              <a:t>x₀</a:t>
-            </a:r>
-            <a:r>
-              <a:rPr lang="ko-KR" altLang="en-US" dirty="0">
-                <a:solidFill>
-                  <a:srgbClr val="FFFFFF"/>
-                </a:solidFill>
-                <a:latin typeface="Malgun Gothic"/>
-              </a:rPr>
-              <a:t>를 </a:t>
-            </a:r>
-            <a:r>
-              <a:rPr lang="ko-KR" altLang="en-US" dirty="0" err="1">
-                <a:solidFill>
-                  <a:srgbClr val="FFFFFF"/>
-                </a:solidFill>
-                <a:latin typeface="Malgun Gothic"/>
-              </a:rPr>
-              <a:t>샘플링한다</a:t>
-            </a:r>
-            <a:r>
-              <a:rPr lang="en-US" altLang="ko-KR" dirty="0">
-                <a:solidFill>
-                  <a:srgbClr val="FFFFFF"/>
-                </a:solidFill>
-                <a:latin typeface="Malgun Gothic"/>
-              </a:rPr>
               <a:t>.</a:t>
             </a:r>
           </a:p>
-          <a:p>
-            <a:r>
-              <a:rPr lang="en-US" altLang="ko-KR" dirty="0">
-                <a:solidFill>
-                  <a:srgbClr val="FFFFFF"/>
-                </a:solidFill>
-                <a:latin typeface="Malgun Gothic"/>
-              </a:rPr>
-              <a:t>• </a:t>
-            </a:r>
-            <a:r>
-              <a:rPr lang="ko-KR" altLang="en-US" dirty="0">
-                <a:solidFill>
-                  <a:srgbClr val="FFFFFF"/>
-                </a:solidFill>
-                <a:latin typeface="Malgun Gothic"/>
-              </a:rPr>
-              <a:t>시간 단계 </a:t>
-            </a:r>
-            <a:r>
-              <a:rPr lang="en-US" altLang="ko-KR" dirty="0">
-                <a:solidFill>
-                  <a:srgbClr val="FFFFFF"/>
-                </a:solidFill>
-                <a:latin typeface="Malgun Gothic"/>
-              </a:rPr>
-              <a:t>t</a:t>
-            </a:r>
-            <a:r>
-              <a:rPr lang="ko-KR" altLang="en-US" dirty="0">
-                <a:solidFill>
-                  <a:srgbClr val="FFFFFF"/>
-                </a:solidFill>
-                <a:latin typeface="Malgun Gothic"/>
-              </a:rPr>
-              <a:t>와 </a:t>
-            </a:r>
-            <a:r>
-              <a:rPr lang="en-US" altLang="ko-KR" dirty="0">
-                <a:solidFill>
-                  <a:srgbClr val="FFFFFF"/>
-                </a:solidFill>
-                <a:latin typeface="Malgun Gothic"/>
-              </a:rPr>
-              <a:t>Gaussian noise ε</a:t>
-            </a:r>
-            <a:r>
-              <a:rPr lang="ko-KR" altLang="en-US" dirty="0">
-                <a:solidFill>
-                  <a:srgbClr val="FFFFFF"/>
-                </a:solidFill>
-                <a:latin typeface="Malgun Gothic"/>
-              </a:rPr>
-              <a:t>를 </a:t>
-            </a:r>
-            <a:r>
-              <a:rPr lang="ko-KR" altLang="en-US" dirty="0" err="1">
-                <a:solidFill>
-                  <a:srgbClr val="FFFFFF"/>
-                </a:solidFill>
-                <a:latin typeface="Malgun Gothic"/>
-              </a:rPr>
-              <a:t>샘플링한다</a:t>
-            </a:r>
-            <a:r>
-              <a:rPr lang="en-US" altLang="ko-KR" dirty="0">
-                <a:solidFill>
-                  <a:srgbClr val="FFFFFF"/>
-                </a:solidFill>
-                <a:latin typeface="Malgun Gothic"/>
-              </a:rPr>
-              <a:t>.</a:t>
-            </a:r>
-          </a:p>
-          <a:p>
-            <a:r>
-              <a:rPr lang="en-US" altLang="ko-KR" dirty="0">
-                <a:solidFill>
-                  <a:srgbClr val="FFFFFF"/>
-                </a:solidFill>
-                <a:latin typeface="Malgun Gothic"/>
-              </a:rPr>
-              <a:t>• xₜ</a:t>
-            </a:r>
-            <a:r>
-              <a:rPr lang="ko-KR" altLang="en-US" dirty="0">
-                <a:solidFill>
-                  <a:srgbClr val="FFFFFF"/>
-                </a:solidFill>
-                <a:latin typeface="Malgun Gothic"/>
-              </a:rPr>
-              <a:t>를 구성하고</a:t>
-            </a:r>
-            <a:r>
-              <a:rPr lang="en-US" altLang="ko-KR" dirty="0">
-                <a:solidFill>
-                  <a:srgbClr val="FFFFFF"/>
-                </a:solidFill>
-                <a:latin typeface="Malgun Gothic"/>
-              </a:rPr>
-              <a:t>, </a:t>
-            </a:r>
-            <a:r>
-              <a:rPr lang="en-US" altLang="ko-KR" dirty="0" err="1">
-                <a:solidFill>
-                  <a:srgbClr val="FFFFFF"/>
-                </a:solidFill>
-                <a:latin typeface="Malgun Gothic"/>
-              </a:rPr>
-              <a:t>εθ</a:t>
-            </a:r>
-            <a:r>
-              <a:rPr lang="ko-KR" altLang="en-US" dirty="0">
-                <a:solidFill>
-                  <a:srgbClr val="FFFFFF"/>
-                </a:solidFill>
-                <a:latin typeface="Malgun Gothic"/>
-              </a:rPr>
-              <a:t>가 </a:t>
-            </a:r>
-            <a:r>
-              <a:rPr lang="en-US" altLang="ko-KR" dirty="0">
-                <a:solidFill>
-                  <a:srgbClr val="FFFFFF"/>
-                </a:solidFill>
-                <a:latin typeface="Malgun Gothic"/>
-              </a:rPr>
-              <a:t>ε</a:t>
-            </a:r>
-            <a:r>
-              <a:rPr lang="ko-KR" altLang="en-US" dirty="0">
-                <a:solidFill>
-                  <a:srgbClr val="FFFFFF"/>
-                </a:solidFill>
-                <a:latin typeface="Malgun Gothic"/>
-              </a:rPr>
-              <a:t>를 예측하도록 </a:t>
-            </a:r>
-            <a:r>
-              <a:rPr lang="en-US" altLang="ko-KR" dirty="0">
-                <a:solidFill>
-                  <a:srgbClr val="FFFFFF"/>
-                </a:solidFill>
-                <a:latin typeface="Malgun Gothic"/>
-              </a:rPr>
-              <a:t>MSE</a:t>
-            </a:r>
-            <a:r>
-              <a:rPr lang="ko-KR" altLang="en-US" dirty="0">
-                <a:solidFill>
-                  <a:srgbClr val="FFFFFF"/>
-                </a:solidFill>
-                <a:latin typeface="Malgun Gothic"/>
-              </a:rPr>
-              <a:t>로 학습한다</a:t>
-            </a:r>
-            <a:r>
-              <a:rPr lang="en-US" altLang="ko-KR" dirty="0">
-                <a:solidFill>
-                  <a:srgbClr val="FFFFFF"/>
-                </a:solidFill>
-                <a:latin typeface="Malgun Gothic"/>
-              </a:rPr>
-              <a:t>.</a:t>
-            </a:r>
-          </a:p>
-        </p:txBody>
-      </p:sp>
-      <p:sp>
-        <p:nvSpPr>
-          <p:cNvPr id="14" name="TextBox 13">
+        </p:txBody>
+      </p:sp>
+      <p:pic>
+        <p:nvPicPr>
+          <p:cNvPr id="12" name="Picture 11" descr="s6_img2_gray.png"/>
+          <p:cNvPicPr>
+            <a:picLocks noChangeAspect="1"/>
+          </p:cNvPicPr>
+          <p:nvPr/>
+        </p:nvPicPr>
+        <p:blipFill>
+          <a:blip r:embed="rId2"/>
+          <a:stretch>
+            <a:fillRect/>
+          </a:stretch>
+        </p:blipFill>
+        <p:spPr>
+          <a:xfrm>
+            <a:off x="3334650" y="5138928"/>
+            <a:ext cx="5446498" cy="768096"/>
+          </a:xfrm>
+          <a:prstGeom prst="rect">
+            <a:avLst/>
+          </a:prstGeom>
+        </p:spPr>
+      </p:pic>
+      <p:sp>
+        <p:nvSpPr>
+          <p:cNvPr id="15" name="TextBox 14">
             <a:extLst>
               <a:ext uri="{FF2B5EF4-FFF2-40B4-BE49-F238E27FC236}">
-                <a16:creationId xmlns:a16="http://schemas.microsoft.com/office/drawing/2014/main" id="{3BF1F7A9-6CF3-2143-2E5F-DAFE2D205208}"/>
+                <a16:creationId xmlns:a16="http://schemas.microsoft.com/office/drawing/2014/main" id="{FA79216B-6491-4C56-7C6A-DE29D990DA41}"/>
               </a:ext>
             </a:extLst>
           </p:cNvPr>
@@ -9864,8 +10454,7 @@
               </a:defRPr>
             </a:pPr>
             <a:r>
-              <a:rPr dirty="0"/>
-              <a:t>Training &amp; Sampling</a:t>
+              <a:t>ε-Prediction</a:t>
             </a:r>
           </a:p>
         </p:txBody>
@@ -9901,7 +10490,7 @@
               </a:defRPr>
             </a:pPr>
             <a:r>
-              <a:t>09</a:t>
+              <a:t>08</a:t>
             </a:r>
           </a:p>
         </p:txBody>
@@ -9950,40 +10539,16 @@
           </a:p>
         </p:txBody>
       </p:sp>
-      <p:pic>
-        <p:nvPicPr>
-          <p:cNvPr id="5" name="Picture 4" descr="s7_img2_gray.png"/>
-          <p:cNvPicPr>
-            <a:picLocks noChangeAspect="1"/>
-          </p:cNvPicPr>
-          <p:nvPr/>
-        </p:nvPicPr>
-        <p:blipFill>
-          <a:blip r:embed="rId2"/>
-          <a:stretch>
-            <a:fillRect/>
-          </a:stretch>
-        </p:blipFill>
-        <p:spPr>
-          <a:xfrm>
-            <a:off x="731520" y="1448709"/>
-            <a:ext cx="10744200" cy="2726140"/>
-          </a:xfrm>
-          <a:prstGeom prst="rect">
-            <a:avLst/>
-          </a:prstGeom>
-        </p:spPr>
-      </p:pic>
-      <p:sp>
-        <p:nvSpPr>
-          <p:cNvPr id="6" name="TextBox 5"/>
+      <p:sp>
+        <p:nvSpPr>
+          <p:cNvPr id="5" name="TextBox 4"/>
           <p:cNvSpPr txBox="1"/>
           <p:nvPr/>
         </p:nvSpPr>
         <p:spPr>
           <a:xfrm>
-            <a:off x="914400" y="4526280"/>
-            <a:ext cx="1097280" cy="320040"/>
+            <a:off x="868680" y="1353312"/>
+            <a:ext cx="10424160" cy="384721"/>
           </a:xfrm>
           <a:prstGeom prst="rect">
             <a:avLst/>
@@ -9996,17 +10561,168 @@
           </a:bodyPr>
           <a:lstStyle/>
           <a:p>
-            <a:pPr algn="l">
-              <a:defRPr sz="1600" b="1">
-                <a:solidFill>
-                  <a:srgbClr val="B4B4B4"/>
+            <a:pPr>
+              <a:defRPr sz="1900" b="0">
+                <a:solidFill>
+                  <a:srgbClr val="F5F5F5"/>
                 </a:solidFill>
                 <a:latin typeface="Noto Sans CJK KR"/>
               </a:defRPr>
             </a:pPr>
             <a:r>
-              <a:t>Training</a:t>
-            </a:r>
+              <a:rPr lang="en-US" altLang="ko-KR" dirty="0">
+                <a:solidFill>
+                  <a:srgbClr val="FFFFFF"/>
+                </a:solidFill>
+                <a:latin typeface="Malgun Gothic"/>
+              </a:rPr>
+              <a:t>DDPM</a:t>
+            </a:r>
+            <a:r>
+              <a:rPr lang="ko-KR" altLang="en-US" dirty="0">
+                <a:solidFill>
+                  <a:srgbClr val="FFFFFF"/>
+                </a:solidFill>
+                <a:latin typeface="Malgun Gothic"/>
+              </a:rPr>
+              <a:t>은 </a:t>
+            </a:r>
+            <a:r>
+              <a:rPr lang="en-US" altLang="ko-KR" dirty="0">
+                <a:solidFill>
+                  <a:srgbClr val="FFFFFF"/>
+                </a:solidFill>
+                <a:latin typeface="Malgun Gothic"/>
+              </a:rPr>
+              <a:t>noise ε</a:t>
+            </a:r>
+            <a:r>
+              <a:rPr lang="ko-KR" altLang="en-US" dirty="0">
+                <a:solidFill>
+                  <a:srgbClr val="FFFFFF"/>
+                </a:solidFill>
+                <a:latin typeface="Malgun Gothic"/>
+              </a:rPr>
+              <a:t>를 예측하는 </a:t>
+            </a:r>
+            <a:r>
+              <a:rPr lang="en-US" altLang="ko-KR" dirty="0">
+                <a:solidFill>
+                  <a:srgbClr val="FFFFFF"/>
+                </a:solidFill>
+                <a:latin typeface="Malgun Gothic"/>
+              </a:rPr>
+              <a:t>network </a:t>
+            </a:r>
+            <a:r>
+              <a:rPr lang="en-US" altLang="ko-KR" dirty="0" err="1">
+                <a:solidFill>
+                  <a:srgbClr val="FFFFFF"/>
+                </a:solidFill>
+                <a:latin typeface="Malgun Gothic"/>
+              </a:rPr>
+              <a:t>εθ</a:t>
+            </a:r>
+            <a:r>
+              <a:rPr lang="en-US" altLang="ko-KR" dirty="0">
+                <a:solidFill>
+                  <a:srgbClr val="FFFFFF"/>
+                </a:solidFill>
+                <a:latin typeface="Malgun Gothic"/>
+              </a:rPr>
+              <a:t>(</a:t>
+            </a:r>
+            <a:r>
+              <a:rPr lang="en-US" altLang="ko-KR" dirty="0" err="1">
+                <a:solidFill>
+                  <a:srgbClr val="FFFFFF"/>
+                </a:solidFill>
+                <a:latin typeface="Malgun Gothic"/>
+              </a:rPr>
+              <a:t>xₜ,t</a:t>
+            </a:r>
+            <a:r>
+              <a:rPr lang="en-US" altLang="ko-KR" dirty="0">
+                <a:solidFill>
+                  <a:srgbClr val="FFFFFF"/>
+                </a:solidFill>
+                <a:latin typeface="Malgun Gothic"/>
+              </a:rPr>
+              <a:t>)</a:t>
+            </a:r>
+            <a:r>
+              <a:rPr lang="ko-KR" altLang="en-US" dirty="0">
+                <a:solidFill>
+                  <a:srgbClr val="FFFFFF"/>
+                </a:solidFill>
+                <a:latin typeface="Malgun Gothic"/>
+              </a:rPr>
+              <a:t>를 이용해 역방향 과정의 평균을 </a:t>
+            </a:r>
+            <a:r>
+              <a:rPr lang="ko-KR" altLang="en-US" dirty="0" err="1">
+                <a:solidFill>
+                  <a:srgbClr val="FFFFFF"/>
+                </a:solidFill>
+                <a:latin typeface="Malgun Gothic"/>
+              </a:rPr>
+              <a:t>매개변수화한다</a:t>
+            </a:r>
+            <a:r>
+              <a:rPr lang="en-US" altLang="ko-KR" dirty="0">
+                <a:solidFill>
+                  <a:srgbClr val="FFFFFF"/>
+                </a:solidFill>
+                <a:latin typeface="Malgun Gothic"/>
+              </a:rPr>
+              <a:t>.</a:t>
+            </a:r>
+          </a:p>
+        </p:txBody>
+      </p:sp>
+      <p:sp>
+        <p:nvSpPr>
+          <p:cNvPr id="6" name="Rectangle 5"/>
+          <p:cNvSpPr/>
+          <p:nvPr/>
+        </p:nvSpPr>
+        <p:spPr>
+          <a:xfrm>
+            <a:off x="914400" y="1965960"/>
+            <a:ext cx="10287000" cy="749808"/>
+          </a:xfrm>
+          <a:prstGeom prst="rect">
+            <a:avLst/>
+          </a:prstGeom>
+          <a:solidFill>
+            <a:srgbClr val="F5F5F5"/>
+          </a:solidFill>
+          <a:ln>
+            <a:solidFill>
+              <a:srgbClr val="F5F5F5"/>
+            </a:solidFill>
+          </a:ln>
+        </p:spPr>
+        <p:style>
+          <a:lnRef idx="1">
+            <a:schemeClr val="accent1"/>
+          </a:lnRef>
+          <a:fillRef idx="3">
+            <a:schemeClr val="accent1"/>
+          </a:fillRef>
+          <a:effectRef idx="2">
+            <a:schemeClr val="accent1"/>
+          </a:effectRef>
+          <a:fontRef idx="minor">
+            <a:schemeClr val="lt1"/>
+          </a:fontRef>
+        </p:style>
+        <p:txBody>
+          <a:bodyPr rtlCol="0" anchor="ctr"/>
+          <a:lstStyle/>
+          <a:p>
+            <a:pPr algn="ctr"/>
+            <a:endParaRPr/>
           </a:p>
         </p:txBody>
       </p:sp>
@@ -10018,8 +10734,73 @@
         </p:nvSpPr>
         <p:spPr>
           <a:xfrm>
-            <a:off x="914400" y="4901184"/>
-            <a:ext cx="4892040" cy="646331"/>
+            <a:off x="1024128" y="2020824"/>
+            <a:ext cx="10067544" cy="640080"/>
+          </a:xfrm>
+          <a:prstGeom prst="rect">
+            <a:avLst/>
+          </a:prstGeom>
+          <a:noFill/>
+        </p:spPr>
+        <p:txBody>
+          <a:bodyPr wrap="square" anchor="ctr">
+            <a:spAutoFit/>
+          </a:bodyPr>
+          <a:lstStyle/>
+          <a:p>
+            <a:pPr algn="ctr">
+              <a:defRPr sz="2200">
+                <a:solidFill>
+                  <a:srgbClr val="000000"/>
+                </a:solidFill>
+                <a:latin typeface="Cambria Math"/>
+              </a:defRPr>
+            </a:pPr>
+            <a:r>
+              <a:rPr dirty="0" err="1"/>
+              <a:t>μθ</a:t>
+            </a:r>
+            <a:r>
+              <a:rPr dirty="0"/>
+              <a:t>(</a:t>
+            </a:r>
+            <a:r>
+              <a:rPr dirty="0" err="1"/>
+              <a:t>xₜ,t</a:t>
+            </a:r>
+            <a:r>
+              <a:rPr dirty="0"/>
+              <a:t>) = 1/√αₜ · ( xₜ − βₜ/√(1−ᾱₜ) · </a:t>
+            </a:r>
+            <a:r>
+              <a:rPr dirty="0" err="1"/>
+              <a:t>εθ</a:t>
+            </a:r>
+            <a:r>
+              <a:rPr dirty="0"/>
+              <a:t>(</a:t>
+            </a:r>
+            <a:r>
+              <a:rPr dirty="0" err="1"/>
+              <a:t>xₜ,t</a:t>
+            </a:r>
+            <a:r>
+              <a:rPr dirty="0"/>
+              <a:t>) )</a:t>
+            </a:r>
+          </a:p>
+        </p:txBody>
+      </p:sp>
+      <p:sp>
+        <p:nvSpPr>
+          <p:cNvPr id="8" name="TextBox 7"/>
+          <p:cNvSpPr txBox="1"/>
+          <p:nvPr/>
+        </p:nvSpPr>
+        <p:spPr>
+          <a:xfrm>
+            <a:off x="868680" y="3044952"/>
+            <a:ext cx="10241280" cy="353943"/>
           </a:xfrm>
           <a:prstGeom prst="rect">
             <a:avLst/>
@@ -10033,21 +10814,30 @@
           <a:lstStyle/>
           <a:p>
             <a:pPr>
-              <a:defRPr sz="1800" b="0">
-                <a:solidFill>
-                  <a:srgbClr val="F5F5F5"/>
+              <a:defRPr sz="1700" b="0">
+                <a:solidFill>
+                  <a:srgbClr val="B4B4B4"/>
                 </a:solidFill>
                 <a:latin typeface="Noto Sans CJK KR"/>
               </a:defRPr>
             </a:pPr>
             <a:r>
+              <a:rPr lang="ko-KR" altLang="en-US" dirty="0">
+                <a:solidFill>
+                  <a:srgbClr val="FFFFFF"/>
+                </a:solidFill>
+                <a:latin typeface="Malgun Gothic"/>
+              </a:rPr>
+              <a:t>이 매개변수화를 사용하면 </a:t>
+            </a:r>
+            <a:r>
               <a:rPr lang="en-US" altLang="ko-KR" dirty="0">
                 <a:solidFill>
                   <a:srgbClr val="FFFFFF"/>
                 </a:solidFill>
                 <a:latin typeface="Malgun Gothic"/>
               </a:rPr>
-              <a:t>t</a:t>
+              <a:t>loss</a:t>
             </a:r>
             <a:r>
               <a:rPr lang="ko-KR" altLang="en-US" dirty="0">
@@ -10056,7 +10846,7 @@
                 </a:solidFill>
                 <a:latin typeface="Malgun Gothic"/>
               </a:rPr>
-              <a:t>를 무작위로 선택하고 </a:t>
+              <a:t> </a:t>
             </a:r>
             <a:r>
               <a:rPr lang="en-US" altLang="ko-KR" dirty="0">
@@ -10065,7 +10855,7 @@
                 </a:solidFill>
                 <a:latin typeface="Malgun Gothic"/>
               </a:rPr>
-              <a:t>xₜ</a:t>
+              <a:t>function</a:t>
             </a:r>
             <a:r>
               <a:rPr lang="ko-KR" altLang="en-US" dirty="0">
@@ -10074,7 +10864,7 @@
                 </a:solidFill>
                 <a:latin typeface="Malgun Gothic"/>
               </a:rPr>
-              <a:t>를 합성한 뒤</a:t>
+              <a:t>은 다음과 같이 단순화 할 수 있다</a:t>
             </a:r>
             <a:r>
               <a:rPr lang="en-US" altLang="ko-KR" dirty="0">
@@ -10083,57 +10873,67 @@
                 </a:solidFill>
                 <a:latin typeface="Malgun Gothic"/>
               </a:rPr>
-              <a:t>, noise-prediction loss</a:t>
-            </a:r>
-            <a:r>
-              <a:rPr lang="ko-KR" altLang="en-US" dirty="0">
-                <a:solidFill>
-                  <a:srgbClr val="FFFFFF"/>
-                </a:solidFill>
-                <a:latin typeface="Malgun Gothic"/>
-              </a:rPr>
-              <a:t>로 </a:t>
-            </a:r>
-            <a:r>
-              <a:rPr lang="en-US" altLang="ko-KR" dirty="0">
-                <a:solidFill>
-                  <a:srgbClr val="FFFFFF"/>
-                </a:solidFill>
-                <a:latin typeface="Malgun Gothic"/>
-              </a:rPr>
-              <a:t>θ</a:t>
-            </a:r>
-            <a:r>
-              <a:rPr lang="ko-KR" altLang="en-US" dirty="0">
-                <a:solidFill>
-                  <a:srgbClr val="FFFFFF"/>
-                </a:solidFill>
-                <a:latin typeface="Malgun Gothic"/>
-              </a:rPr>
-              <a:t>를 업데이트한다</a:t>
-            </a:r>
-            <a:r>
-              <a:rPr lang="en-US" altLang="ko-KR" dirty="0">
-                <a:solidFill>
-                  <a:srgbClr val="FFFFFF"/>
-                </a:solidFill>
-                <a:latin typeface="Malgun Gothic"/>
-              </a:rPr>
-              <a:t>.</a:t>
-            </a:r>
-          </a:p>
-        </p:txBody>
-      </p:sp>
-      <p:sp>
-        <p:nvSpPr>
-          <p:cNvPr id="8" name="TextBox 7"/>
+              <a:t>!</a:t>
+            </a:r>
+          </a:p>
+        </p:txBody>
+      </p:sp>
+      <p:sp>
+        <p:nvSpPr>
+          <p:cNvPr id="9" name="Rectangle 8"/>
+          <p:cNvSpPr/>
+          <p:nvPr/>
+        </p:nvSpPr>
+        <p:spPr>
+          <a:xfrm>
+            <a:off x="914400" y="3584448"/>
+            <a:ext cx="10287000" cy="896112"/>
+          </a:xfrm>
+          <a:prstGeom prst="rect">
+            <a:avLst/>
+          </a:prstGeom>
+          <a:solidFill>
+            <a:srgbClr val="F5F5F5"/>
+          </a:solidFill>
+          <a:ln>
+            <a:solidFill>
+              <a:srgbClr val="F5F5F5"/>
+            </a:solidFill>
+          </a:ln>
+        </p:spPr>
+        <p:style>
+          <a:lnRef idx="1">
+            <a:schemeClr val="accent1"/>
+          </a:lnRef>
+          <a:fillRef idx="3">
+            <a:schemeClr val="accent1"/>
+          </a:fillRef>
+          <a:effectRef idx="2">
+            <a:schemeClr val="accent1"/>
+          </a:effectRef>
+          <a:fontRef idx="minor">
+            <a:schemeClr val="lt1"/>
+          </a:fontRef>
+        </p:style>
+        <p:txBody>
+          <a:bodyPr rtlCol="0" anchor="ctr"/>
+          <a:lstStyle/>
+          <a:p>
+            <a:pPr algn="ctr"/>
+            <a:endParaRPr/>
+          </a:p>
+        </p:txBody>
+      </p:sp>
+      <p:sp>
+        <p:nvSpPr>
+          <p:cNvPr id="10" name="TextBox 9"/>
           <p:cNvSpPr txBox="1"/>
           <p:nvPr/>
         </p:nvSpPr>
         <p:spPr>
           <a:xfrm>
-            <a:off x="6400800" y="4526280"/>
-            <a:ext cx="1097280" cy="320040"/>
+            <a:off x="1024128" y="3639312"/>
+            <a:ext cx="10067544" cy="786384"/>
           </a:xfrm>
           <a:prstGeom prst="rect">
             <a:avLst/>
@@ -10141,35 +10941,35 @@
           <a:noFill/>
         </p:spPr>
         <p:txBody>
-          <a:bodyPr wrap="square" anchor="t">
+          <a:bodyPr wrap="square" anchor="ctr">
             <a:spAutoFit/>
           </a:bodyPr>
           <a:lstStyle/>
           <a:p>
-            <a:pPr algn="l">
-              <a:defRPr sz="1600" b="1">
-                <a:solidFill>
-                  <a:srgbClr val="B4B4B4"/>
-                </a:solidFill>
-                <a:latin typeface="Noto Sans CJK KR"/>
+            <a:pPr algn="ctr">
+              <a:defRPr sz="2000">
+                <a:solidFill>
+                  <a:srgbClr val="000000"/>
+                </a:solidFill>
+                <a:latin typeface="Cambria Math"/>
               </a:defRPr>
             </a:pPr>
             <a:r>
-              <a:t>Sampling</a:t>
-            </a:r>
-          </a:p>
-        </p:txBody>
-      </p:sp>
-      <p:sp>
-        <p:nvSpPr>
-          <p:cNvPr id="9" name="TextBox 8"/>
+              <a:t>Lsimple(θ) = Eₜ,ₓ₀,ε [ ‖ ε − εθ( √ᾱₜ x₀ + √(1−ᾱₜ) ε , t ) ‖² ]</a:t>
+            </a:r>
+          </a:p>
+        </p:txBody>
+      </p:sp>
+      <p:sp>
+        <p:nvSpPr>
+          <p:cNvPr id="11" name="TextBox 10"/>
           <p:cNvSpPr txBox="1"/>
           <p:nvPr/>
         </p:nvSpPr>
         <p:spPr>
           <a:xfrm>
-            <a:off x="6400800" y="4901184"/>
-            <a:ext cx="4617720" cy="646331"/>
+            <a:off x="932688" y="4736592"/>
+            <a:ext cx="10149840" cy="907941"/>
           </a:xfrm>
           <a:prstGeom prst="rect">
             <a:avLst/>
@@ -10177,13 +10977,16 @@
           <a:noFill/>
         </p:spPr>
         <p:txBody>
-          <a:bodyPr wrap="square" anchor="t">
+          <a:bodyPr wrap="square">
             <a:spAutoFit/>
           </a:bodyPr>
           <a:lstStyle/>
           <a:p>
             <a:pPr>
-              <a:defRPr sz="1800" b="0">
+              <a:spcAft>
+                <a:spcPts val="0"/>
+              </a:spcAft>
+              <a:defRPr sz="1700">
                 <a:solidFill>
                   <a:srgbClr val="F5F5F5"/>
                 </a:solidFill>
@@ -10191,12 +10994,13 @@
               </a:defRPr>
             </a:pPr>
             <a:r>
-              <a:rPr dirty="0" err="1"/>
-              <a:t>xT</a:t>
-            </a:r>
-            <a:r>
-              <a:rPr dirty="0"/>
-              <a:t> ~ N(0,I)</a:t>
+              <a:rPr lang="en-US" altLang="ko-KR" dirty="0">
+                <a:solidFill>
+                  <a:srgbClr val="FFFFFF"/>
+                </a:solidFill>
+                <a:latin typeface="Malgun Gothic"/>
+              </a:rPr>
+              <a:t>• </a:t>
             </a:r>
             <a:r>
               <a:rPr lang="ko-KR" altLang="en-US" dirty="0">
@@ -10205,7 +11009,7 @@
                 </a:solidFill>
                 <a:latin typeface="Malgun Gothic"/>
               </a:rPr>
-              <a:t>에서 시작하여 </a:t>
+              <a:t>데이터 분포에서 </a:t>
             </a:r>
             <a:r>
               <a:rPr lang="en-US" altLang="ko-KR" dirty="0">
@@ -10214,7 +11018,7 @@
                 </a:solidFill>
                 <a:latin typeface="Malgun Gothic"/>
               </a:rPr>
-              <a:t>xₜ₋₁</a:t>
+              <a:t>x₀</a:t>
             </a:r>
             <a:r>
               <a:rPr lang="ko-KR" altLang="en-US" dirty="0">
@@ -10223,7 +11027,16 @@
                 </a:solidFill>
                 <a:latin typeface="Malgun Gothic"/>
               </a:rPr>
-              <a:t>을 반복적으로 샘플링하고 최종적으로 </a:t>
+              <a:t>를 </a:t>
+            </a:r>
+            <a:r>
+              <a:rPr lang="ko-KR" altLang="en-US" dirty="0" err="1">
+                <a:solidFill>
+                  <a:srgbClr val="FFFFFF"/>
+                </a:solidFill>
+                <a:latin typeface="Malgun Gothic"/>
+              </a:rPr>
+              <a:t>샘플링한다</a:t>
             </a:r>
             <a:r>
               <a:rPr lang="en-US" altLang="ko-KR" dirty="0">
@@ -10232,7 +11045,18 @@
                 </a:solidFill>
                 <a:latin typeface="Malgun Gothic"/>
               </a:rPr>
-              <a:t>x₀</a:t>
+              <a:t>.</a:t>
+            </a:r>
+          </a:p>
+          <a:p>
+            <a:r>
+              <a:rPr lang="en-US" altLang="ko-KR" dirty="0">
+                <a:solidFill>
+                  <a:srgbClr val="FFFFFF"/>
+                </a:solidFill>
+                <a:latin typeface="Malgun Gothic"/>
+              </a:rPr>
+              <a:t>• </a:t>
             </a:r>
             <a:r>
               <a:rPr lang="ko-KR" altLang="en-US" dirty="0">
@@ -10241,7 +11065,7 @@
                 </a:solidFill>
                 <a:latin typeface="Malgun Gothic"/>
               </a:rPr>
-              <a:t>를 얻는다</a:t>
+              <a:t>시간 단계 </a:t>
             </a:r>
             <a:r>
               <a:rPr lang="en-US" altLang="ko-KR" dirty="0">
@@ -10250,18 +11074,154 @@
                 </a:solidFill>
                 <a:latin typeface="Malgun Gothic"/>
               </a:rPr>
+              <a:t>t</a:t>
+            </a:r>
+            <a:r>
+              <a:rPr lang="ko-KR" altLang="en-US" dirty="0">
+                <a:solidFill>
+                  <a:srgbClr val="FFFFFF"/>
+                </a:solidFill>
+                <a:latin typeface="Malgun Gothic"/>
+              </a:rPr>
+              <a:t>와 </a:t>
+            </a:r>
+            <a:r>
+              <a:rPr lang="en-US" altLang="ko-KR" dirty="0">
+                <a:solidFill>
+                  <a:srgbClr val="FFFFFF"/>
+                </a:solidFill>
+                <a:latin typeface="Malgun Gothic"/>
+              </a:rPr>
+              <a:t>Gaussian noise ε</a:t>
+            </a:r>
+            <a:r>
+              <a:rPr lang="ko-KR" altLang="en-US" dirty="0">
+                <a:solidFill>
+                  <a:srgbClr val="FFFFFF"/>
+                </a:solidFill>
+                <a:latin typeface="Malgun Gothic"/>
+              </a:rPr>
+              <a:t>를 </a:t>
+            </a:r>
+            <a:r>
+              <a:rPr lang="ko-KR" altLang="en-US" dirty="0" err="1">
+                <a:solidFill>
+                  <a:srgbClr val="FFFFFF"/>
+                </a:solidFill>
+                <a:latin typeface="Malgun Gothic"/>
+              </a:rPr>
+              <a:t>샘플링한다</a:t>
+            </a:r>
+            <a:r>
+              <a:rPr lang="en-US" altLang="ko-KR" dirty="0">
+                <a:solidFill>
+                  <a:srgbClr val="FFFFFF"/>
+                </a:solidFill>
+                <a:latin typeface="Malgun Gothic"/>
+              </a:rPr>
               <a:t>.</a:t>
             </a:r>
-            <a:endParaRPr dirty="0"/>
-          </a:p>
-        </p:txBody>
-      </p:sp>
-      <p:sp>
-        <p:nvSpPr>
-          <p:cNvPr id="12" name="TextBox 11">
+          </a:p>
+          <a:p>
+            <a:r>
+              <a:rPr lang="en-US" altLang="ko-KR" dirty="0">
+                <a:solidFill>
+                  <a:srgbClr val="FFFFFF"/>
+                </a:solidFill>
+                <a:latin typeface="Malgun Gothic"/>
+              </a:rPr>
+              <a:t>• xₜ</a:t>
+            </a:r>
+            <a:r>
+              <a:rPr lang="ko-KR" altLang="en-US" dirty="0">
+                <a:solidFill>
+                  <a:srgbClr val="FFFFFF"/>
+                </a:solidFill>
+                <a:latin typeface="Malgun Gothic"/>
+              </a:rPr>
+              <a:t>를 구성하고</a:t>
+            </a:r>
+            <a:r>
+              <a:rPr lang="en-US" altLang="ko-KR" dirty="0">
+                <a:solidFill>
+                  <a:srgbClr val="FFFFFF"/>
+                </a:solidFill>
+                <a:latin typeface="Malgun Gothic"/>
+              </a:rPr>
+              <a:t>, </a:t>
+            </a:r>
+            <a:r>
+              <a:rPr lang="en-US" altLang="ko-KR" dirty="0" err="1">
+                <a:solidFill>
+                  <a:srgbClr val="FFFFFF"/>
+                </a:solidFill>
+                <a:latin typeface="Malgun Gothic"/>
+              </a:rPr>
+              <a:t>εθ</a:t>
+            </a:r>
+            <a:r>
+              <a:rPr lang="ko-KR" altLang="en-US" dirty="0">
+                <a:solidFill>
+                  <a:srgbClr val="FFFFFF"/>
+                </a:solidFill>
+                <a:latin typeface="Malgun Gothic"/>
+              </a:rPr>
+              <a:t>가 </a:t>
+            </a:r>
+            <a:r>
+              <a:rPr lang="en-US" altLang="ko-KR" dirty="0">
+                <a:solidFill>
+                  <a:srgbClr val="FFFFFF"/>
+                </a:solidFill>
+                <a:latin typeface="Malgun Gothic"/>
+              </a:rPr>
+              <a:t>ε</a:t>
+            </a:r>
+            <a:r>
+              <a:rPr lang="ko-KR" altLang="en-US" dirty="0">
+                <a:solidFill>
+                  <a:srgbClr val="FFFFFF"/>
+                </a:solidFill>
+                <a:latin typeface="Malgun Gothic"/>
+              </a:rPr>
+              <a:t>를 예측하도록 </a:t>
+            </a:r>
+            <a:r>
+              <a:rPr lang="en-US" altLang="ko-KR" dirty="0">
+                <a:solidFill>
+                  <a:srgbClr val="FFFFFF"/>
+                </a:solidFill>
+                <a:latin typeface="Malgun Gothic"/>
+              </a:rPr>
+              <a:t>MSE</a:t>
+            </a:r>
+            <a:r>
+              <a:rPr lang="ko-KR" altLang="en-US" dirty="0">
+                <a:solidFill>
+                  <a:srgbClr val="FFFFFF"/>
+                </a:solidFill>
+                <a:latin typeface="Malgun Gothic"/>
+              </a:rPr>
+              <a:t>로 학습한다</a:t>
+            </a:r>
+            <a:r>
+              <a:rPr lang="en-US" altLang="ko-KR" dirty="0">
+                <a:solidFill>
+                  <a:srgbClr val="FFFFFF"/>
+                </a:solidFill>
+                <a:latin typeface="Malgun Gothic"/>
+              </a:rPr>
+              <a:t>.</a:t>
+            </a:r>
+          </a:p>
+        </p:txBody>
+      </p:sp>
+      <p:sp>
+        <p:nvSpPr>
+          <p:cNvPr id="14" name="TextBox 13">
             <a:extLst>
               <a:ext uri="{FF2B5EF4-FFF2-40B4-BE49-F238E27FC236}">
-                <a16:creationId xmlns:a16="http://schemas.microsoft.com/office/drawing/2014/main" id="{A97993BF-086B-4046-DA06-4D1FC083CA62}"/>
+                <a16:creationId xmlns:a16="http://schemas.microsoft.com/office/drawing/2014/main" id="{3BF1F7A9-6CF3-2143-2E5F-DAFE2D205208}"/>
               </a:ext>
             </a:extLst>
           </p:cNvPr>
